--- a/docs/presentations/CM_IMA_EAPM_variants_comparison.pptx
+++ b/docs/presentations/CM_IMA_EAPM_variants_comparison.pptx
@@ -25,6 +25,8 @@
     <p:sldId id="273" r:id="rId24"/>
     <p:sldId id="274" r:id="rId25"/>
     <p:sldId id="275" r:id="rId26"/>
+    <p:sldId id="276" r:id="rId27"/>
+    <p:sldId id="277" r:id="rId28"/>
   </p:sldIdLst>
   <p:sldSz cx="12191695" cy="6858000" type="screen4x3"/>
   <p:notesSz cx="6858000" cy="9144000"/>
@@ -7656,8 +7658,8 @@
         </p:nvSpPr>
         <p:spPr>
           <a:xfrm>
-            <a:off x="457200" y="320040"/>
-            <a:ext cx="11247120" cy="731520"/>
+            <a:off x="457200" y="228600"/>
+            <a:ext cx="11247120" cy="640080"/>
           </a:xfrm>
           <a:prstGeom prst="rect">
             <a:avLst/>
@@ -7671,27 +7673,51 @@
           <a:lstStyle/>
           <a:p>
             <a:r>
-              <a:rPr sz="2600" b="1">
+              <a:rPr sz="2200" b="1">
                 <a:solidFill>
                   <a:srgbClr val="003366"/>
                 </a:solidFill>
                 <a:latin typeface="Calibri"/>
               </a:rPr>
-              <a:t>Выводы и рекомендации</a:t>
-            </a:r>
-          </a:p>
-        </p:txBody>
-      </p:sp>
-      <p:sp>
-        <p:nvSpPr>
-          <p:cNvPr id="3" name="TextBox 2"/>
+              <a:t>Сводная аналитика: рейтинг вариантов</a:t>
+            </a:r>
+          </a:p>
+        </p:txBody>
+      </p:sp>
+      <p:pic>
+        <p:nvPicPr>
+          <p:cNvPr id="3" name="Picture 2" descr="rating_analytics.png"/>
+          <p:cNvPicPr>
+            <a:picLocks noChangeAspect="1"/>
+          </p:cNvPicPr>
+          <p:nvPr/>
+        </p:nvPicPr>
+        <p:blipFill>
+          <a:blip r:embed="rId2"/>
+          <a:stretch>
+            <a:fillRect/>
+          </a:stretch>
+        </p:blipFill>
+        <p:spPr>
+          <a:xfrm>
+            <a:off x="365760" y="914400"/>
+            <a:ext cx="11430000" cy="6956267"/>
+          </a:xfrm>
+          <a:prstGeom prst="rect">
+            <a:avLst/>
+          </a:prstGeom>
+        </p:spPr>
+      </p:pic>
+      <p:sp>
+        <p:nvSpPr>
+          <p:cNvPr id="4" name="TextBox 3"/>
           <p:cNvSpPr txBox="1"/>
           <p:nvPr/>
         </p:nvSpPr>
         <p:spPr>
           <a:xfrm>
-            <a:off x="640080" y="1097280"/>
-            <a:ext cx="10972800" cy="5303520"/>
+            <a:off x="457200" y="6263640"/>
+            <a:ext cx="10972800" cy="457200"/>
           </a:xfrm>
           <a:prstGeom prst="rect">
             <a:avLst/>
@@ -7699,73 +7725,19 @@
           <a:noFill/>
         </p:spPr>
         <p:txBody>
-          <a:bodyPr wrap="square">
+          <a:bodyPr wrap="none">
             <a:spAutoFit/>
           </a:bodyPr>
           <a:lstStyle/>
           <a:p>
-            <a:pPr>
-              <a:spcAft>
-                <a:spcPts val="600"/>
-              </a:spcAft>
-            </a:pPr>
-            <a:r>
-              <a:rPr sz="1600" b="0">
-                <a:latin typeface="Calibri"/>
-              </a:rPr>
-              <a:t>• Вариант 1 задаёт стратегическое направление, но требует отдельной оценки ТРЗ перед принятием решения.</a:t>
-            </a:r>
-          </a:p>
-          <a:p>
-            <a:pPr>
-              <a:spcAft>
-                <a:spcPts val="600"/>
-              </a:spcAft>
-            </a:pPr>
-            <a:r>
-              <a:rPr sz="1600" b="0">
-                <a:latin typeface="Calibri"/>
-              </a:rPr>
-              <a:t>• Вариант 2 (ЕАРМ-1) — полная консолидация, но с максимальными трудозатратами и рисками миграции.</a:t>
-            </a:r>
-          </a:p>
-          <a:p>
-            <a:pPr>
-              <a:spcAft>
-                <a:spcPts val="600"/>
-              </a:spcAft>
-            </a:pPr>
-            <a:r>
-              <a:rPr sz="1600" b="0">
-                <a:latin typeface="Calibri"/>
-              </a:rPr>
-              <a:t>• Вариант 3 (ЕАРМ-2) — оптимален как поэтапный шаг: быстрее, дешевле, с сохранением ЦМ ИМА.</a:t>
-            </a:r>
-          </a:p>
-          <a:p>
-            <a:pPr>
-              <a:spcAft>
-                <a:spcPts val="600"/>
-              </a:spcAft>
-            </a:pPr>
-            <a:r>
-              <a:rPr sz="1600" b="0">
-                <a:latin typeface="Calibri"/>
-              </a:rPr>
-              <a:t>• Возможна стратегия: Вариант 3 → накопление опыта интеграции → Вариант 1/2 при готовности ЕАРМ.</a:t>
-            </a:r>
-          </a:p>
-          <a:p>
-            <a:pPr>
-              <a:spcAft>
-                <a:spcPts val="600"/>
-              </a:spcAft>
-            </a:pPr>
-            <a:r>
-              <a:rPr sz="1600" b="0">
-                <a:latin typeface="Calibri"/>
-              </a:rPr>
-              <a:t>• Критично согласовать контракты API AirFlow и источник валидированной ТМ до старта работ.</a:t>
+            <a:r>
+              <a:rPr sz="1100" b="0">
+                <a:solidFill>
+                  <a:srgbClr val="555555"/>
+                </a:solidFill>
+                <a:latin typeface="Calibri"/>
+              </a:rPr>
+              <a:t>Шкала 1–5 по 8 критериям | Взвешенный рейтинг: В1 — 3,8 | В2 — 3,3 | В3 — 3,7</a:t>
             </a:r>
           </a:p>
         </p:txBody>
@@ -7906,6 +7878,302 @@
 </file>
 
 <file path=ppt/slides/slide20.xml><?xml version="1.0" encoding="utf-8"?>
+<p:sld xmlns:a="http://schemas.openxmlformats.org/drawingml/2006/main" xmlns:p="http://schemas.openxmlformats.org/presentationml/2006/main" xmlns:r="http://schemas.openxmlformats.org/officeDocument/2006/relationships">
+  <p:cSld>
+    <p:spTree>
+      <p:nvGrpSpPr>
+        <p:cNvPr id="1" name=""/>
+        <p:cNvGrpSpPr/>
+        <p:nvPr/>
+      </p:nvGrpSpPr>
+      <p:grpSpPr/>
+      <p:sp>
+        <p:nvSpPr>
+          <p:cNvPr id="2" name="TextBox 1"/>
+          <p:cNvSpPr txBox="1"/>
+          <p:nvPr/>
+        </p:nvSpPr>
+        <p:spPr>
+          <a:xfrm>
+            <a:off x="457200" y="320040"/>
+            <a:ext cx="11247120" cy="731520"/>
+          </a:xfrm>
+          <a:prstGeom prst="rect">
+            <a:avLst/>
+          </a:prstGeom>
+          <a:noFill/>
+        </p:spPr>
+        <p:txBody>
+          <a:bodyPr wrap="none">
+            <a:spAutoFit/>
+          </a:bodyPr>
+          <a:lstStyle/>
+          <a:p>
+            <a:r>
+              <a:rPr sz="2600" b="1">
+                <a:solidFill>
+                  <a:srgbClr val="003366"/>
+                </a:solidFill>
+                <a:latin typeface="Calibri"/>
+              </a:rPr>
+              <a:t>Интерпретация рейтинга</a:t>
+            </a:r>
+          </a:p>
+        </p:txBody>
+      </p:sp>
+      <p:sp>
+        <p:nvSpPr>
+          <p:cNvPr id="3" name="TextBox 2"/>
+          <p:cNvSpPr txBox="1"/>
+          <p:nvPr/>
+        </p:nvSpPr>
+        <p:spPr>
+          <a:xfrm>
+            <a:off x="640080" y="1097280"/>
+            <a:ext cx="10972800" cy="5303520"/>
+          </a:xfrm>
+          <a:prstGeom prst="rect">
+            <a:avLst/>
+          </a:prstGeom>
+          <a:noFill/>
+        </p:spPr>
+        <p:txBody>
+          <a:bodyPr wrap="square">
+            <a:spAutoFit/>
+          </a:bodyPr>
+          <a:lstStyle/>
+          <a:p>
+            <a:pPr>
+              <a:spcAft>
+                <a:spcPts val="600"/>
+              </a:spcAft>
+            </a:pPr>
+            <a:r>
+              <a:rPr sz="1600" b="0">
+                <a:latin typeface="Calibri"/>
+              </a:rPr>
+              <a:t>• Вариант 3 лидирует по скорости внедрения и экономичности (126,6 ч/д vs 281,7 ч/д у В2).</a:t>
+            </a:r>
+          </a:p>
+          <a:p>
+            <a:pPr lvl="1">
+              <a:spcAft>
+                <a:spcPts val="300"/>
+              </a:spcAft>
+            </a:pPr>
+            <a:r>
+              <a:rPr sz="1400" b="0">
+                <a:solidFill>
+                  <a:srgbClr val="555555"/>
+                </a:solidFill>
+                <a:latin typeface="Calibri"/>
+              </a:rPr>
+              <a:t>– ★★★★★ — 5 баллов | ★☆☆☆☆ — 1 балл</a:t>
+            </a:r>
+          </a:p>
+          <a:p>
+            <a:pPr>
+              <a:spcAft>
+                <a:spcPts val="600"/>
+              </a:spcAft>
+            </a:pPr>
+            <a:r>
+              <a:rPr sz="1600" b="0">
+                <a:latin typeface="Calibri"/>
+              </a:rPr>
+              <a:t>• Варианты 1 и 2 максимальны по консолидации ИТ и соответствию целевой архитектуре.</a:t>
+            </a:r>
+          </a:p>
+          <a:p>
+            <a:pPr>
+              <a:spcAft>
+                <a:spcPts val="600"/>
+              </a:spcAft>
+            </a:pPr>
+            <a:r>
+              <a:rPr sz="1600" b="0">
+                <a:latin typeface="Calibri"/>
+              </a:rPr>
+              <a:t>• Вариант 1 — лучший по гибкости экспертов (песочница MVP) и стратегической ценности.</a:t>
+            </a:r>
+          </a:p>
+          <a:p>
+            <a:pPr>
+              <a:spcAft>
+                <a:spcPts val="600"/>
+              </a:spcAft>
+            </a:pPr>
+            <a:r>
+              <a:rPr sz="1600" b="0">
+                <a:latin typeface="Calibri"/>
+              </a:rPr>
+              <a:t>• Вариант 2 проигрывает по ТРЗ и рискам миграции, но даёт полный перенос стека.</a:t>
+            </a:r>
+          </a:p>
+          <a:p>
+            <a:pPr>
+              <a:spcAft>
+                <a:spcPts val="600"/>
+              </a:spcAft>
+            </a:pPr>
+            <a:r>
+              <a:rPr sz="1600" b="0">
+                <a:latin typeface="Calibri"/>
+              </a:rPr>
+              <a:t>• Рекомендуемая траектория: В3 (быстрый старт) → накопление опыта → В1/В2.</a:t>
+            </a:r>
+          </a:p>
+        </p:txBody>
+      </p:sp>
+    </p:spTree>
+  </p:cSld>
+  <p:clrMapOvr>
+    <a:masterClrMapping/>
+  </p:clrMapOvr>
+</p:sld>
+</file>
+
+<file path=ppt/slides/slide21.xml><?xml version="1.0" encoding="utf-8"?>
+<p:sld xmlns:a="http://schemas.openxmlformats.org/drawingml/2006/main" xmlns:p="http://schemas.openxmlformats.org/presentationml/2006/main" xmlns:r="http://schemas.openxmlformats.org/officeDocument/2006/relationships">
+  <p:cSld>
+    <p:spTree>
+      <p:nvGrpSpPr>
+        <p:cNvPr id="1" name=""/>
+        <p:cNvGrpSpPr/>
+        <p:nvPr/>
+      </p:nvGrpSpPr>
+      <p:grpSpPr/>
+      <p:sp>
+        <p:nvSpPr>
+          <p:cNvPr id="2" name="TextBox 1"/>
+          <p:cNvSpPr txBox="1"/>
+          <p:nvPr/>
+        </p:nvSpPr>
+        <p:spPr>
+          <a:xfrm>
+            <a:off x="457200" y="320040"/>
+            <a:ext cx="11247120" cy="731520"/>
+          </a:xfrm>
+          <a:prstGeom prst="rect">
+            <a:avLst/>
+          </a:prstGeom>
+          <a:noFill/>
+        </p:spPr>
+        <p:txBody>
+          <a:bodyPr wrap="none">
+            <a:spAutoFit/>
+          </a:bodyPr>
+          <a:lstStyle/>
+          <a:p>
+            <a:r>
+              <a:rPr sz="2600" b="1">
+                <a:solidFill>
+                  <a:srgbClr val="003366"/>
+                </a:solidFill>
+                <a:latin typeface="Calibri"/>
+              </a:rPr>
+              <a:t>Выводы и рекомендации</a:t>
+            </a:r>
+          </a:p>
+        </p:txBody>
+      </p:sp>
+      <p:sp>
+        <p:nvSpPr>
+          <p:cNvPr id="3" name="TextBox 2"/>
+          <p:cNvSpPr txBox="1"/>
+          <p:nvPr/>
+        </p:nvSpPr>
+        <p:spPr>
+          <a:xfrm>
+            <a:off x="640080" y="1097280"/>
+            <a:ext cx="10972800" cy="5303520"/>
+          </a:xfrm>
+          <a:prstGeom prst="rect">
+            <a:avLst/>
+          </a:prstGeom>
+          <a:noFill/>
+        </p:spPr>
+        <p:txBody>
+          <a:bodyPr wrap="square">
+            <a:spAutoFit/>
+          </a:bodyPr>
+          <a:lstStyle/>
+          <a:p>
+            <a:pPr>
+              <a:spcAft>
+                <a:spcPts val="600"/>
+              </a:spcAft>
+            </a:pPr>
+            <a:r>
+              <a:rPr sz="1600" b="0">
+                <a:latin typeface="Calibri"/>
+              </a:rPr>
+              <a:t>• Вариант 1 задаёт стратегическое направление, но требует отдельной оценки ТРЗ перед принятием решения.</a:t>
+            </a:r>
+          </a:p>
+          <a:p>
+            <a:pPr>
+              <a:spcAft>
+                <a:spcPts val="600"/>
+              </a:spcAft>
+            </a:pPr>
+            <a:r>
+              <a:rPr sz="1600" b="0">
+                <a:latin typeface="Calibri"/>
+              </a:rPr>
+              <a:t>• Вариант 2 (ЕАРМ-1) — полная консолидация, но с максимальными трудозатратами и рисками миграции.</a:t>
+            </a:r>
+          </a:p>
+          <a:p>
+            <a:pPr>
+              <a:spcAft>
+                <a:spcPts val="600"/>
+              </a:spcAft>
+            </a:pPr>
+            <a:r>
+              <a:rPr sz="1600" b="0">
+                <a:latin typeface="Calibri"/>
+              </a:rPr>
+              <a:t>• Вариант 3 (ЕАРМ-2) — оптимален как поэтапный шаг: быстрее, дешевле, с сохранением ЦМ ИМА.</a:t>
+            </a:r>
+          </a:p>
+          <a:p>
+            <a:pPr>
+              <a:spcAft>
+                <a:spcPts val="600"/>
+              </a:spcAft>
+            </a:pPr>
+            <a:r>
+              <a:rPr sz="1600" b="0">
+                <a:latin typeface="Calibri"/>
+              </a:rPr>
+              <a:t>• Возможна стратегия: Вариант 3 → накопление опыта интеграции → Вариант 1/2 при готовности ЕАРМ.</a:t>
+            </a:r>
+          </a:p>
+          <a:p>
+            <a:pPr>
+              <a:spcAft>
+                <a:spcPts val="600"/>
+              </a:spcAft>
+            </a:pPr>
+            <a:r>
+              <a:rPr sz="1600" b="0">
+                <a:latin typeface="Calibri"/>
+              </a:rPr>
+              <a:t>• Критично согласовать контракты API AirFlow и источник валидированной ТМ до старта работ.</a:t>
+            </a:r>
+          </a:p>
+        </p:txBody>
+      </p:sp>
+    </p:spTree>
+  </p:cSld>
+  <p:clrMapOvr>
+    <a:masterClrMapping/>
+  </p:clrMapOvr>
+</p:sld>
+</file>
+
+<file path=ppt/slides/slide22.xml><?xml version="1.0" encoding="utf-8"?>
 <p:sld xmlns:a="http://schemas.openxmlformats.org/drawingml/2006/main" xmlns:p="http://schemas.openxmlformats.org/presentationml/2006/main" xmlns:r="http://schemas.openxmlformats.org/officeDocument/2006/relationships">
   <p:cSld>
     <p:spTree>

--- a/docs/presentations/CM_IMA_EAPM_variants_comparison.pptx
+++ b/docs/presentations/CM_IMA_EAPM_variants_comparison.pptx
@@ -5315,7 +5315,7 @@
         <p:spPr>
           <a:xfrm>
             <a:off x="365760" y="914400"/>
-            <a:ext cx="11430000" cy="6534651"/>
+            <a:ext cx="11430000" cy="6211316"/>
           </a:xfrm>
           <a:prstGeom prst="rect">
             <a:avLst/>
@@ -7701,7 +7701,7 @@
         <p:spPr>
           <a:xfrm>
             <a:off x="365760" y="914400"/>
-            <a:ext cx="11430000" cy="6956267"/>
+            <a:ext cx="11430000" cy="7692789"/>
           </a:xfrm>
           <a:prstGeom prst="rect">
             <a:avLst/>
@@ -8537,7 +8537,7 @@
         <p:spPr>
           <a:xfrm>
             <a:off x="365760" y="914400"/>
-            <a:ext cx="11430000" cy="6534651"/>
+            <a:ext cx="11430000" cy="4882834"/>
           </a:xfrm>
           <a:prstGeom prst="rect">
             <a:avLst/>
@@ -9070,7 +9070,7 @@
         <p:spPr>
           <a:xfrm>
             <a:off x="365760" y="914400"/>
-            <a:ext cx="11430000" cy="6534651"/>
+            <a:ext cx="11430000" cy="4282189"/>
           </a:xfrm>
           <a:prstGeom prst="rect">
             <a:avLst/>

--- a/docs/presentations/CM_IMA_EAPM_variants_comparison.pptx
+++ b/docs/presentations/CM_IMA_EAPM_variants_comparison.pptx
@@ -10957,30 +10957,856 @@
           </a:p>
         </p:txBody>
       </p:sp>
-      <p:pic>
-        <p:nvPicPr>
-          <p:cNvPr id="9" name="Picture 8" descr="rating_analytics.png"/>
-          <p:cNvPicPr>
-            <a:picLocks noChangeAspect="1"/>
-          </p:cNvPicPr>
-          <p:nvPr/>
-        </p:nvPicPr>
-        <p:blipFill>
-          <a:blip r:embed="rId2"/>
-          <a:stretch>
-            <a:fillRect/>
-          </a:stretch>
-        </p:blipFill>
-        <p:spPr>
-          <a:xfrm>
-            <a:off x="411480" y="914400"/>
-            <a:ext cx="11338560" cy="4508745"/>
-          </a:xfrm>
-          <a:prstGeom prst="rect">
-            <a:avLst/>
-          </a:prstGeom>
-        </p:spPr>
-      </p:pic>
+      <p:graphicFrame>
+        <p:nvGraphicFramePr>
+          <p:cNvPr id="9" name="Table 8"/>
+          <p:cNvGraphicFramePr>
+            <a:graphicFrameLocks noGrp="1"/>
+          </p:cNvGraphicFramePr>
+          <p:nvPr/>
+        </p:nvGraphicFramePr>
+        <p:xfrm>
+          <a:off x="365760" y="960120"/>
+          <a:ext cx="6949440" cy="3977639"/>
+        </p:xfrm>
+        <a:graphic>
+          <a:graphicData uri="http://schemas.openxmlformats.org/drawingml/2006/table">
+            <a:tbl>
+              <a:tblPr firstRow="1" bandRow="1">
+                <a:tableStyleId>{5C22544A-7EE6-4342-B048-85BDC9FD1C3A}</a:tableStyleId>
+              </a:tblPr>
+              <a:tblGrid>
+                <a:gridCol w="3108960"/>
+                <a:gridCol w="1280160"/>
+                <a:gridCol w="1280160"/>
+                <a:gridCol w="1280160"/>
+              </a:tblGrid>
+              <a:tr h="441959">
+                <a:tc>
+                  <a:txBody>
+                    <a:bodyPr/>
+                    <a:lstStyle/>
+                    <a:p>
+                      <a:pPr algn="ctr"/>
+                      <a:r>
+                        <a:rPr sz="900" b="1">
+                          <a:solidFill>
+                            <a:srgbClr val="FFFFFF"/>
+                          </a:solidFill>
+                          <a:latin typeface="Calibri"/>
+                        </a:rPr>
+                        <a:t>Критерий</a:t>
+                      </a:r>
+                    </a:p>
+                  </a:txBody>
+                  <a:tcPr anchor="ctr">
+                    <a:solidFill>
+                      <a:srgbClr val="003366"/>
+                    </a:solidFill>
+                  </a:tcPr>
+                </a:tc>
+                <a:tc>
+                  <a:txBody>
+                    <a:bodyPr/>
+                    <a:lstStyle/>
+                    <a:p>
+                      <a:pPr algn="ctr"/>
+                      <a:r>
+                        <a:rPr sz="900" b="1">
+                          <a:solidFill>
+                            <a:srgbClr val="FFFFFF"/>
+                          </a:solidFill>
+                          <a:latin typeface="Calibri"/>
+                        </a:rPr>
+                        <a:t>В1 — перенос</a:t>
+                      </a:r>
+                    </a:p>
+                  </a:txBody>
+                  <a:tcPr anchor="ctr">
+                    <a:solidFill>
+                      <a:srgbClr val="003366"/>
+                    </a:solidFill>
+                  </a:tcPr>
+                </a:tc>
+                <a:tc>
+                  <a:txBody>
+                    <a:bodyPr/>
+                    <a:lstStyle/>
+                    <a:p>
+                      <a:pPr algn="ctr"/>
+                      <a:r>
+                        <a:rPr sz="900" b="1">
+                          <a:solidFill>
+                            <a:srgbClr val="FFFFFF"/>
+                          </a:solidFill>
+                          <a:latin typeface="Calibri"/>
+                        </a:rPr>
+                        <a:t>В2 — ЕАРМ-1</a:t>
+                      </a:r>
+                    </a:p>
+                  </a:txBody>
+                  <a:tcPr anchor="ctr">
+                    <a:solidFill>
+                      <a:srgbClr val="003366"/>
+                    </a:solidFill>
+                  </a:tcPr>
+                </a:tc>
+                <a:tc>
+                  <a:txBody>
+                    <a:bodyPr/>
+                    <a:lstStyle/>
+                    <a:p>
+                      <a:pPr algn="ctr"/>
+                      <a:r>
+                        <a:rPr sz="900" b="1">
+                          <a:solidFill>
+                            <a:srgbClr val="FFFFFF"/>
+                          </a:solidFill>
+                          <a:latin typeface="Calibri"/>
+                        </a:rPr>
+                        <a:t>В3 — ЕАРМ-2</a:t>
+                      </a:r>
+                    </a:p>
+                  </a:txBody>
+                  <a:tcPr anchor="ctr">
+                    <a:solidFill>
+                      <a:srgbClr val="003366"/>
+                    </a:solidFill>
+                  </a:tcPr>
+                </a:tc>
+              </a:tr>
+              <a:tr h="441959">
+                <a:tc>
+                  <a:txBody>
+                    <a:bodyPr/>
+                    <a:lstStyle/>
+                    <a:p>
+                      <a:r>
+                        <a:rPr sz="800" b="0">
+                          <a:solidFill>
+                            <a:srgbClr val="333333"/>
+                          </a:solidFill>
+                          <a:latin typeface="Calibri"/>
+                        </a:rPr>
+                        <a:t>Скорость внедрения</a:t>
+                      </a:r>
+                    </a:p>
+                  </a:txBody>
+                  <a:tcPr anchor="ctr"/>
+                </a:tc>
+                <a:tc>
+                  <a:txBody>
+                    <a:bodyPr/>
+                    <a:lstStyle/>
+                    <a:p>
+                      <a:pPr algn="ctr"/>
+                      <a:r>
+                        <a:rPr sz="1100" b="1">
+                          <a:solidFill>
+                            <a:srgbClr val="003366"/>
+                          </a:solidFill>
+                          <a:latin typeface="Calibri"/>
+                        </a:rPr>
+                        <a:t>2</a:t>
+                      </a:r>
+                    </a:p>
+                  </a:txBody>
+                  <a:tcPr anchor="ctr">
+                    <a:solidFill>
+                      <a:srgbClr val="C5D9ED"/>
+                    </a:solidFill>
+                  </a:tcPr>
+                </a:tc>
+                <a:tc>
+                  <a:txBody>
+                    <a:bodyPr/>
+                    <a:lstStyle/>
+                    <a:p>
+                      <a:pPr algn="ctr"/>
+                      <a:r>
+                        <a:rPr sz="1100" b="1">
+                          <a:solidFill>
+                            <a:srgbClr val="003366"/>
+                          </a:solidFill>
+                          <a:latin typeface="Calibri"/>
+                        </a:rPr>
+                        <a:t>2</a:t>
+                      </a:r>
+                    </a:p>
+                  </a:txBody>
+                  <a:tcPr anchor="ctr">
+                    <a:solidFill>
+                      <a:srgbClr val="C5D9ED"/>
+                    </a:solidFill>
+                  </a:tcPr>
+                </a:tc>
+                <a:tc>
+                  <a:txBody>
+                    <a:bodyPr/>
+                    <a:lstStyle/>
+                    <a:p>
+                      <a:pPr algn="ctr"/>
+                      <a:r>
+                        <a:rPr sz="1100" b="1">
+                          <a:solidFill>
+                            <a:srgbClr val="FFFFFF"/>
+                          </a:solidFill>
+                          <a:latin typeface="Calibri"/>
+                        </a:rPr>
+                        <a:t>5</a:t>
+                      </a:r>
+                    </a:p>
+                  </a:txBody>
+                  <a:tcPr anchor="ctr">
+                    <a:solidFill>
+                      <a:srgbClr val="003366"/>
+                    </a:solidFill>
+                  </a:tcPr>
+                </a:tc>
+              </a:tr>
+              <a:tr h="441959">
+                <a:tc>
+                  <a:txBody>
+                    <a:bodyPr/>
+                    <a:lstStyle/>
+                    <a:p>
+                      <a:r>
+                        <a:rPr sz="800" b="0">
+                          <a:solidFill>
+                            <a:srgbClr val="333333"/>
+                          </a:solidFill>
+                          <a:latin typeface="Calibri"/>
+                        </a:rPr>
+                        <a:t>Экономичность (ТРЗ)</a:t>
+                      </a:r>
+                    </a:p>
+                  </a:txBody>
+                  <a:tcPr anchor="ctr">
+                    <a:solidFill>
+                      <a:srgbClr val="E8EEF4"/>
+                    </a:solidFill>
+                  </a:tcPr>
+                </a:tc>
+                <a:tc>
+                  <a:txBody>
+                    <a:bodyPr/>
+                    <a:lstStyle/>
+                    <a:p>
+                      <a:pPr algn="ctr"/>
+                      <a:r>
+                        <a:rPr sz="1100" b="1">
+                          <a:solidFill>
+                            <a:srgbClr val="003366"/>
+                          </a:solidFill>
+                          <a:latin typeface="Calibri"/>
+                        </a:rPr>
+                        <a:t>3</a:t>
+                      </a:r>
+                    </a:p>
+                  </a:txBody>
+                  <a:tcPr anchor="ctr">
+                    <a:solidFill>
+                      <a:srgbClr val="7EB3DD"/>
+                    </a:solidFill>
+                  </a:tcPr>
+                </a:tc>
+                <a:tc>
+                  <a:txBody>
+                    <a:bodyPr/>
+                    <a:lstStyle/>
+                    <a:p>
+                      <a:pPr algn="ctr"/>
+                      <a:r>
+                        <a:rPr sz="1100" b="1">
+                          <a:solidFill>
+                            <a:srgbClr val="003366"/>
+                          </a:solidFill>
+                          <a:latin typeface="Calibri"/>
+                        </a:rPr>
+                        <a:t>2</a:t>
+                      </a:r>
+                    </a:p>
+                  </a:txBody>
+                  <a:tcPr anchor="ctr">
+                    <a:solidFill>
+                      <a:srgbClr val="C5D9ED"/>
+                    </a:solidFill>
+                  </a:tcPr>
+                </a:tc>
+                <a:tc>
+                  <a:txBody>
+                    <a:bodyPr/>
+                    <a:lstStyle/>
+                    <a:p>
+                      <a:pPr algn="ctr"/>
+                      <a:r>
+                        <a:rPr sz="1100" b="1">
+                          <a:solidFill>
+                            <a:srgbClr val="FFFFFF"/>
+                          </a:solidFill>
+                          <a:latin typeface="Calibri"/>
+                        </a:rPr>
+                        <a:t>5</a:t>
+                      </a:r>
+                    </a:p>
+                  </a:txBody>
+                  <a:tcPr anchor="ctr">
+                    <a:solidFill>
+                      <a:srgbClr val="003366"/>
+                    </a:solidFill>
+                  </a:tcPr>
+                </a:tc>
+              </a:tr>
+              <a:tr h="441959">
+                <a:tc>
+                  <a:txBody>
+                    <a:bodyPr/>
+                    <a:lstStyle/>
+                    <a:p>
+                      <a:r>
+                        <a:rPr sz="800" b="0">
+                          <a:solidFill>
+                            <a:srgbClr val="333333"/>
+                          </a:solidFill>
+                          <a:latin typeface="Calibri"/>
+                        </a:rPr>
+                        <a:t>Консолидация ИТ</a:t>
+                      </a:r>
+                    </a:p>
+                  </a:txBody>
+                  <a:tcPr anchor="ctr"/>
+                </a:tc>
+                <a:tc>
+                  <a:txBody>
+                    <a:bodyPr/>
+                    <a:lstStyle/>
+                    <a:p>
+                      <a:pPr algn="ctr"/>
+                      <a:r>
+                        <a:rPr sz="1100" b="1">
+                          <a:solidFill>
+                            <a:srgbClr val="FFFFFF"/>
+                          </a:solidFill>
+                          <a:latin typeface="Calibri"/>
+                        </a:rPr>
+                        <a:t>5</a:t>
+                      </a:r>
+                    </a:p>
+                  </a:txBody>
+                  <a:tcPr anchor="ctr">
+                    <a:solidFill>
+                      <a:srgbClr val="003366"/>
+                    </a:solidFill>
+                  </a:tcPr>
+                </a:tc>
+                <a:tc>
+                  <a:txBody>
+                    <a:bodyPr/>
+                    <a:lstStyle/>
+                    <a:p>
+                      <a:pPr algn="ctr"/>
+                      <a:r>
+                        <a:rPr sz="1100" b="1">
+                          <a:solidFill>
+                            <a:srgbClr val="FFFFFF"/>
+                          </a:solidFill>
+                          <a:latin typeface="Calibri"/>
+                        </a:rPr>
+                        <a:t>5</a:t>
+                      </a:r>
+                    </a:p>
+                  </a:txBody>
+                  <a:tcPr anchor="ctr">
+                    <a:solidFill>
+                      <a:srgbClr val="003366"/>
+                    </a:solidFill>
+                  </a:tcPr>
+                </a:tc>
+                <a:tc>
+                  <a:txBody>
+                    <a:bodyPr/>
+                    <a:lstStyle/>
+                    <a:p>
+                      <a:pPr algn="ctr"/>
+                      <a:r>
+                        <a:rPr sz="1100" b="1">
+                          <a:solidFill>
+                            <a:srgbClr val="003366"/>
+                          </a:solidFill>
+                          <a:latin typeface="Calibri"/>
+                        </a:rPr>
+                        <a:t>2</a:t>
+                      </a:r>
+                    </a:p>
+                  </a:txBody>
+                  <a:tcPr anchor="ctr">
+                    <a:solidFill>
+                      <a:srgbClr val="C5D9ED"/>
+                    </a:solidFill>
+                  </a:tcPr>
+                </a:tc>
+              </a:tr>
+              <a:tr h="441959">
+                <a:tc>
+                  <a:txBody>
+                    <a:bodyPr/>
+                    <a:lstStyle/>
+                    <a:p>
+                      <a:r>
+                        <a:rPr sz="800" b="0">
+                          <a:solidFill>
+                            <a:srgbClr val="333333"/>
+                          </a:solidFill>
+                          <a:latin typeface="Calibri"/>
+                        </a:rPr>
+                        <a:t>Целевая архитектура</a:t>
+                      </a:r>
+                    </a:p>
+                  </a:txBody>
+                  <a:tcPr anchor="ctr">
+                    <a:solidFill>
+                      <a:srgbClr val="E8EEF4"/>
+                    </a:solidFill>
+                  </a:tcPr>
+                </a:tc>
+                <a:tc>
+                  <a:txBody>
+                    <a:bodyPr/>
+                    <a:lstStyle/>
+                    <a:p>
+                      <a:pPr algn="ctr"/>
+                      <a:r>
+                        <a:rPr sz="1100" b="1">
+                          <a:solidFill>
+                            <a:srgbClr val="FFFFFF"/>
+                          </a:solidFill>
+                          <a:latin typeface="Calibri"/>
+                        </a:rPr>
+                        <a:t>5</a:t>
+                      </a:r>
+                    </a:p>
+                  </a:txBody>
+                  <a:tcPr anchor="ctr">
+                    <a:solidFill>
+                      <a:srgbClr val="003366"/>
+                    </a:solidFill>
+                  </a:tcPr>
+                </a:tc>
+                <a:tc>
+                  <a:txBody>
+                    <a:bodyPr/>
+                    <a:lstStyle/>
+                    <a:p>
+                      <a:pPr algn="ctr"/>
+                      <a:r>
+                        <a:rPr sz="1100" b="1">
+                          <a:solidFill>
+                            <a:srgbClr val="FFFFFF"/>
+                          </a:solidFill>
+                          <a:latin typeface="Calibri"/>
+                        </a:rPr>
+                        <a:t>4</a:t>
+                      </a:r>
+                    </a:p>
+                  </a:txBody>
+                  <a:tcPr anchor="ctr">
+                    <a:solidFill>
+                      <a:srgbClr val="3A8DC7"/>
+                    </a:solidFill>
+                  </a:tcPr>
+                </a:tc>
+                <a:tc>
+                  <a:txBody>
+                    <a:bodyPr/>
+                    <a:lstStyle/>
+                    <a:p>
+                      <a:pPr algn="ctr"/>
+                      <a:r>
+                        <a:rPr sz="1100" b="1">
+                          <a:solidFill>
+                            <a:srgbClr val="003366"/>
+                          </a:solidFill>
+                          <a:latin typeface="Calibri"/>
+                        </a:rPr>
+                        <a:t>3</a:t>
+                      </a:r>
+                    </a:p>
+                  </a:txBody>
+                  <a:tcPr anchor="ctr">
+                    <a:solidFill>
+                      <a:srgbClr val="7EB3DD"/>
+                    </a:solidFill>
+                  </a:tcPr>
+                </a:tc>
+              </a:tr>
+              <a:tr h="441959">
+                <a:tc>
+                  <a:txBody>
+                    <a:bodyPr/>
+                    <a:lstStyle/>
+                    <a:p>
+                      <a:r>
+                        <a:rPr sz="800" b="0">
+                          <a:solidFill>
+                            <a:srgbClr val="333333"/>
+                          </a:solidFill>
+                          <a:latin typeface="Calibri"/>
+                        </a:rPr>
+                        <a:t>Управление рисками</a:t>
+                      </a:r>
+                    </a:p>
+                  </a:txBody>
+                  <a:tcPr anchor="ctr"/>
+                </a:tc>
+                <a:tc>
+                  <a:txBody>
+                    <a:bodyPr/>
+                    <a:lstStyle/>
+                    <a:p>
+                      <a:pPr algn="ctr"/>
+                      <a:r>
+                        <a:rPr sz="1100" b="1">
+                          <a:solidFill>
+                            <a:srgbClr val="003366"/>
+                          </a:solidFill>
+                          <a:latin typeface="Calibri"/>
+                        </a:rPr>
+                        <a:t>2</a:t>
+                      </a:r>
+                    </a:p>
+                  </a:txBody>
+                  <a:tcPr anchor="ctr">
+                    <a:solidFill>
+                      <a:srgbClr val="C5D9ED"/>
+                    </a:solidFill>
+                  </a:tcPr>
+                </a:tc>
+                <a:tc>
+                  <a:txBody>
+                    <a:bodyPr/>
+                    <a:lstStyle/>
+                    <a:p>
+                      <a:pPr algn="ctr"/>
+                      <a:r>
+                        <a:rPr sz="1100" b="1">
+                          <a:solidFill>
+                            <a:srgbClr val="003366"/>
+                          </a:solidFill>
+                          <a:latin typeface="Calibri"/>
+                        </a:rPr>
+                        <a:t>2</a:t>
+                      </a:r>
+                    </a:p>
+                  </a:txBody>
+                  <a:tcPr anchor="ctr">
+                    <a:solidFill>
+                      <a:srgbClr val="C5D9ED"/>
+                    </a:solidFill>
+                  </a:tcPr>
+                </a:tc>
+                <a:tc>
+                  <a:txBody>
+                    <a:bodyPr/>
+                    <a:lstStyle/>
+                    <a:p>
+                      <a:pPr algn="ctr"/>
+                      <a:r>
+                        <a:rPr sz="1100" b="1">
+                          <a:solidFill>
+                            <a:srgbClr val="FFFFFF"/>
+                          </a:solidFill>
+                          <a:latin typeface="Calibri"/>
+                        </a:rPr>
+                        <a:t>4</a:t>
+                      </a:r>
+                    </a:p>
+                  </a:txBody>
+                  <a:tcPr anchor="ctr">
+                    <a:solidFill>
+                      <a:srgbClr val="3A8DC7"/>
+                    </a:solidFill>
+                  </a:tcPr>
+                </a:tc>
+              </a:tr>
+              <a:tr h="441959">
+                <a:tc>
+                  <a:txBody>
+                    <a:bodyPr/>
+                    <a:lstStyle/>
+                    <a:p>
+                      <a:r>
+                        <a:rPr sz="800" b="0">
+                          <a:solidFill>
+                            <a:srgbClr val="333333"/>
+                          </a:solidFill>
+                          <a:latin typeface="Calibri"/>
+                        </a:rPr>
+                        <a:t>Гибкость экспертов</a:t>
+                      </a:r>
+                    </a:p>
+                  </a:txBody>
+                  <a:tcPr anchor="ctr">
+                    <a:solidFill>
+                      <a:srgbClr val="E8EEF4"/>
+                    </a:solidFill>
+                  </a:tcPr>
+                </a:tc>
+                <a:tc>
+                  <a:txBody>
+                    <a:bodyPr/>
+                    <a:lstStyle/>
+                    <a:p>
+                      <a:pPr algn="ctr"/>
+                      <a:r>
+                        <a:rPr sz="1100" b="1">
+                          <a:solidFill>
+                            <a:srgbClr val="FFFFFF"/>
+                          </a:solidFill>
+                          <a:latin typeface="Calibri"/>
+                        </a:rPr>
+                        <a:t>5</a:t>
+                      </a:r>
+                    </a:p>
+                  </a:txBody>
+                  <a:tcPr anchor="ctr">
+                    <a:solidFill>
+                      <a:srgbClr val="003366"/>
+                    </a:solidFill>
+                  </a:tcPr>
+                </a:tc>
+                <a:tc>
+                  <a:txBody>
+                    <a:bodyPr/>
+                    <a:lstStyle/>
+                    <a:p>
+                      <a:pPr algn="ctr"/>
+                      <a:r>
+                        <a:rPr sz="1100" b="1">
+                          <a:solidFill>
+                            <a:srgbClr val="003366"/>
+                          </a:solidFill>
+                          <a:latin typeface="Calibri"/>
+                        </a:rPr>
+                        <a:t>3</a:t>
+                      </a:r>
+                    </a:p>
+                  </a:txBody>
+                  <a:tcPr anchor="ctr">
+                    <a:solidFill>
+                      <a:srgbClr val="7EB3DD"/>
+                    </a:solidFill>
+                  </a:tcPr>
+                </a:tc>
+                <a:tc>
+                  <a:txBody>
+                    <a:bodyPr/>
+                    <a:lstStyle/>
+                    <a:p>
+                      <a:pPr algn="ctr"/>
+                      <a:r>
+                        <a:rPr sz="1100" b="1">
+                          <a:solidFill>
+                            <a:srgbClr val="FFFFFF"/>
+                          </a:solidFill>
+                          <a:latin typeface="Calibri"/>
+                        </a:rPr>
+                        <a:t>4</a:t>
+                      </a:r>
+                    </a:p>
+                  </a:txBody>
+                  <a:tcPr anchor="ctr">
+                    <a:solidFill>
+                      <a:srgbClr val="3A8DC7"/>
+                    </a:solidFill>
+                  </a:tcPr>
+                </a:tc>
+              </a:tr>
+              <a:tr h="441959">
+                <a:tc>
+                  <a:txBody>
+                    <a:bodyPr/>
+                    <a:lstStyle/>
+                    <a:p>
+                      <a:r>
+                        <a:rPr sz="800" b="0">
+                          <a:solidFill>
+                            <a:srgbClr val="333333"/>
+                          </a:solidFill>
+                          <a:latin typeface="Calibri"/>
+                        </a:rPr>
+                        <a:t>Простота сопровождения</a:t>
+                      </a:r>
+                    </a:p>
+                  </a:txBody>
+                  <a:tcPr anchor="ctr"/>
+                </a:tc>
+                <a:tc>
+                  <a:txBody>
+                    <a:bodyPr/>
+                    <a:lstStyle/>
+                    <a:p>
+                      <a:pPr algn="ctr"/>
+                      <a:r>
+                        <a:rPr sz="1100" b="1">
+                          <a:solidFill>
+                            <a:srgbClr val="FFFFFF"/>
+                          </a:solidFill>
+                          <a:latin typeface="Calibri"/>
+                        </a:rPr>
+                        <a:t>4</a:t>
+                      </a:r>
+                    </a:p>
+                  </a:txBody>
+                  <a:tcPr anchor="ctr">
+                    <a:solidFill>
+                      <a:srgbClr val="3A8DC7"/>
+                    </a:solidFill>
+                  </a:tcPr>
+                </a:tc>
+                <a:tc>
+                  <a:txBody>
+                    <a:bodyPr/>
+                    <a:lstStyle/>
+                    <a:p>
+                      <a:pPr algn="ctr"/>
+                      <a:r>
+                        <a:rPr sz="1100" b="1">
+                          <a:solidFill>
+                            <a:srgbClr val="003366"/>
+                          </a:solidFill>
+                          <a:latin typeface="Calibri"/>
+                        </a:rPr>
+                        <a:t>3</a:t>
+                      </a:r>
+                    </a:p>
+                  </a:txBody>
+                  <a:tcPr anchor="ctr">
+                    <a:solidFill>
+                      <a:srgbClr val="7EB3DD"/>
+                    </a:solidFill>
+                  </a:tcPr>
+                </a:tc>
+                <a:tc>
+                  <a:txBody>
+                    <a:bodyPr/>
+                    <a:lstStyle/>
+                    <a:p>
+                      <a:pPr algn="ctr"/>
+                      <a:r>
+                        <a:rPr sz="1100" b="1">
+                          <a:solidFill>
+                            <a:srgbClr val="003366"/>
+                          </a:solidFill>
+                          <a:latin typeface="Calibri"/>
+                        </a:rPr>
+                        <a:t>2</a:t>
+                      </a:r>
+                    </a:p>
+                  </a:txBody>
+                  <a:tcPr anchor="ctr">
+                    <a:solidFill>
+                      <a:srgbClr val="C5D9ED"/>
+                    </a:solidFill>
+                  </a:tcPr>
+                </a:tc>
+              </a:tr>
+              <a:tr h="441967">
+                <a:tc>
+                  <a:txBody>
+                    <a:bodyPr/>
+                    <a:lstStyle/>
+                    <a:p>
+                      <a:r>
+                        <a:rPr sz="800" b="0">
+                          <a:solidFill>
+                            <a:srgbClr val="333333"/>
+                          </a:solidFill>
+                          <a:latin typeface="Calibri"/>
+                        </a:rPr>
+                        <a:t>Интеграция данных</a:t>
+                      </a:r>
+                    </a:p>
+                  </a:txBody>
+                  <a:tcPr anchor="ctr">
+                    <a:solidFill>
+                      <a:srgbClr val="E8EEF4"/>
+                    </a:solidFill>
+                  </a:tcPr>
+                </a:tc>
+                <a:tc>
+                  <a:txBody>
+                    <a:bodyPr/>
+                    <a:lstStyle/>
+                    <a:p>
+                      <a:pPr algn="ctr"/>
+                      <a:r>
+                        <a:rPr sz="1100" b="1">
+                          <a:solidFill>
+                            <a:srgbClr val="FFFFFF"/>
+                          </a:solidFill>
+                          <a:latin typeface="Calibri"/>
+                        </a:rPr>
+                        <a:t>4</a:t>
+                      </a:r>
+                    </a:p>
+                  </a:txBody>
+                  <a:tcPr anchor="ctr">
+                    <a:solidFill>
+                      <a:srgbClr val="3A8DC7"/>
+                    </a:solidFill>
+                  </a:tcPr>
+                </a:tc>
+                <a:tc>
+                  <a:txBody>
+                    <a:bodyPr/>
+                    <a:lstStyle/>
+                    <a:p>
+                      <a:pPr algn="ctr"/>
+                      <a:r>
+                        <a:rPr sz="1100" b="1">
+                          <a:solidFill>
+                            <a:srgbClr val="FFFFFF"/>
+                          </a:solidFill>
+                          <a:latin typeface="Calibri"/>
+                        </a:rPr>
+                        <a:t>5</a:t>
+                      </a:r>
+                    </a:p>
+                  </a:txBody>
+                  <a:tcPr anchor="ctr">
+                    <a:solidFill>
+                      <a:srgbClr val="003366"/>
+                    </a:solidFill>
+                  </a:tcPr>
+                </a:tc>
+                <a:tc>
+                  <a:txBody>
+                    <a:bodyPr/>
+                    <a:lstStyle/>
+                    <a:p>
+                      <a:pPr algn="ctr"/>
+                      <a:r>
+                        <a:rPr sz="1100" b="1">
+                          <a:solidFill>
+                            <a:srgbClr val="FFFFFF"/>
+                          </a:solidFill>
+                          <a:latin typeface="Calibri"/>
+                        </a:rPr>
+                        <a:t>4</a:t>
+                      </a:r>
+                    </a:p>
+                  </a:txBody>
+                  <a:tcPr anchor="ctr">
+                    <a:solidFill>
+                      <a:srgbClr val="3A8DC7"/>
+                    </a:solidFill>
+                  </a:tcPr>
+                </a:tc>
+              </a:tr>
+            </a:tbl>
+          </a:graphicData>
+        </a:graphic>
+      </p:graphicFrame>
       <p:sp>
         <p:nvSpPr>
           <p:cNvPr id="10" name="TextBox 9"/>
@@ -10989,8 +11815,8 @@
         </p:nvSpPr>
         <p:spPr>
           <a:xfrm>
-            <a:off x="502920" y="6199632"/>
-            <a:ext cx="11155680" cy="320040"/>
+            <a:off x="411480" y="5010912"/>
+            <a:ext cx="6858000" cy="256032"/>
           </a:xfrm>
           <a:prstGeom prst="rect">
             <a:avLst/>
@@ -11004,13 +11830,709 @@
           <a:lstStyle/>
           <a:p>
             <a:r>
-              <a:rPr sz="900" b="0">
+              <a:rPr sz="800" b="0">
                 <a:solidFill>
                   <a:srgbClr val="666666"/>
                 </a:solidFill>
                 <a:latin typeface="Calibri"/>
               </a:rPr>
-              <a:t>Методика оценок — на диаграмме (блок «Источник и методика»)</a:t>
+              <a:t>Шкала: 1 — низко  ·  5 — высоко  |  Тёмнее ячейка = выше балл</a:t>
+            </a:r>
+          </a:p>
+        </p:txBody>
+      </p:sp>
+      <p:sp>
+        <p:nvSpPr>
+          <p:cNvPr id="11" name="TextBox 10"/>
+          <p:cNvSpPr txBox="1"/>
+          <p:nvPr/>
+        </p:nvSpPr>
+        <p:spPr>
+          <a:xfrm>
+            <a:off x="7589520" y="960120"/>
+            <a:ext cx="4206240" cy="320040"/>
+          </a:xfrm>
+          <a:prstGeom prst="rect">
+            <a:avLst/>
+          </a:prstGeom>
+          <a:noFill/>
+        </p:spPr>
+        <p:txBody>
+          <a:bodyPr wrap="none">
+            <a:spAutoFit/>
+          </a:bodyPr>
+          <a:lstStyle/>
+          <a:p>
+            <a:r>
+              <a:rPr sz="1300" b="1">
+                <a:solidFill>
+                  <a:srgbClr val="003366"/>
+                </a:solidFill>
+                <a:latin typeface="Calibri"/>
+              </a:rPr>
+              <a:t>Итоговый взвешенный рейтинг</a:t>
+            </a:r>
+          </a:p>
+        </p:txBody>
+      </p:sp>
+      <p:sp>
+        <p:nvSpPr>
+          <p:cNvPr id="12" name="TextBox 11"/>
+          <p:cNvSpPr txBox="1"/>
+          <p:nvPr/>
+        </p:nvSpPr>
+        <p:spPr>
+          <a:xfrm>
+            <a:off x="7589520" y="1417320"/>
+            <a:ext cx="1005840" cy="320040"/>
+          </a:xfrm>
+          <a:prstGeom prst="rect">
+            <a:avLst/>
+          </a:prstGeom>
+          <a:noFill/>
+        </p:spPr>
+        <p:txBody>
+          <a:bodyPr wrap="none">
+            <a:spAutoFit/>
+          </a:bodyPr>
+          <a:lstStyle/>
+          <a:p>
+            <a:r>
+              <a:rPr sz="900" b="0">
+                <a:solidFill>
+                  <a:srgbClr val="333333"/>
+                </a:solidFill>
+                <a:latin typeface="Calibri"/>
+              </a:rPr>
+              <a:t>В1 — целевой перенос</a:t>
+            </a:r>
+          </a:p>
+        </p:txBody>
+      </p:sp>
+      <p:sp>
+        <p:nvSpPr>
+          <p:cNvPr id="13" name="Rounded Rectangle 12"/>
+          <p:cNvSpPr/>
+          <p:nvPr/>
+        </p:nvSpPr>
+        <p:spPr>
+          <a:xfrm>
+            <a:off x="8686800" y="1463040"/>
+            <a:ext cx="2926080" cy="201168"/>
+          </a:xfrm>
+          <a:prstGeom prst="roundRect">
+            <a:avLst/>
+          </a:prstGeom>
+          <a:solidFill>
+            <a:srgbClr val="E8EEF4"/>
+          </a:solidFill>
+          <a:ln>
+            <a:solidFill>
+              <a:srgbClr val="CCCCCC"/>
+            </a:solidFill>
+          </a:ln>
+        </p:spPr>
+        <p:style>
+          <a:lnRef idx="1">
+            <a:schemeClr val="accent1"/>
+          </a:lnRef>
+          <a:fillRef idx="3">
+            <a:schemeClr val="accent1"/>
+          </a:fillRef>
+          <a:effectRef idx="2">
+            <a:schemeClr val="accent1"/>
+          </a:effectRef>
+          <a:fontRef idx="minor">
+            <a:schemeClr val="lt1"/>
+          </a:fontRef>
+        </p:style>
+        <p:txBody>
+          <a:bodyPr rtlCol="0" anchor="ctr"/>
+          <a:lstStyle/>
+          <a:p>
+            <a:pPr algn="ctr"/>
+          </a:p>
+        </p:txBody>
+      </p:sp>
+      <p:sp>
+        <p:nvSpPr>
+          <p:cNvPr id="14" name="Rounded Rectangle 13"/>
+          <p:cNvSpPr/>
+          <p:nvPr/>
+        </p:nvSpPr>
+        <p:spPr>
+          <a:xfrm>
+            <a:off x="8686800" y="1463040"/>
+            <a:ext cx="2113280" cy="201168"/>
+          </a:xfrm>
+          <a:prstGeom prst="roundRect">
+            <a:avLst/>
+          </a:prstGeom>
+          <a:solidFill>
+            <a:srgbClr val="0070C0"/>
+          </a:solidFill>
+          <a:ln>
+            <a:noFill/>
+          </a:ln>
+        </p:spPr>
+        <p:style>
+          <a:lnRef idx="1">
+            <a:schemeClr val="accent1"/>
+          </a:lnRef>
+          <a:fillRef idx="3">
+            <a:schemeClr val="accent1"/>
+          </a:fillRef>
+          <a:effectRef idx="2">
+            <a:schemeClr val="accent1"/>
+          </a:effectRef>
+          <a:fontRef idx="minor">
+            <a:schemeClr val="lt1"/>
+          </a:fontRef>
+        </p:style>
+        <p:txBody>
+          <a:bodyPr rtlCol="0" anchor="ctr"/>
+          <a:lstStyle/>
+          <a:p>
+            <a:pPr algn="ctr"/>
+          </a:p>
+        </p:txBody>
+      </p:sp>
+      <p:sp>
+        <p:nvSpPr>
+          <p:cNvPr id="15" name="TextBox 14"/>
+          <p:cNvSpPr txBox="1"/>
+          <p:nvPr/>
+        </p:nvSpPr>
+        <p:spPr>
+          <a:xfrm>
+            <a:off x="11704320" y="1417320"/>
+            <a:ext cx="822960" cy="320040"/>
+          </a:xfrm>
+          <a:prstGeom prst="rect">
+            <a:avLst/>
+          </a:prstGeom>
+          <a:noFill/>
+        </p:spPr>
+        <p:txBody>
+          <a:bodyPr wrap="none">
+            <a:spAutoFit/>
+          </a:bodyPr>
+          <a:lstStyle/>
+          <a:p>
+            <a:r>
+              <a:rPr sz="1000" b="1">
+                <a:solidFill>
+                  <a:srgbClr val="0070C0"/>
+                </a:solidFill>
+                <a:latin typeface="Calibri"/>
+              </a:rPr>
+              <a:t>3.6/5</a:t>
+            </a:r>
+          </a:p>
+        </p:txBody>
+      </p:sp>
+      <p:sp>
+        <p:nvSpPr>
+          <p:cNvPr id="16" name="TextBox 15"/>
+          <p:cNvSpPr txBox="1"/>
+          <p:nvPr/>
+        </p:nvSpPr>
+        <p:spPr>
+          <a:xfrm>
+            <a:off x="7589520" y="2075688"/>
+            <a:ext cx="1005840" cy="320040"/>
+          </a:xfrm>
+          <a:prstGeom prst="rect">
+            <a:avLst/>
+          </a:prstGeom>
+          <a:noFill/>
+        </p:spPr>
+        <p:txBody>
+          <a:bodyPr wrap="none">
+            <a:spAutoFit/>
+          </a:bodyPr>
+          <a:lstStyle/>
+          <a:p>
+            <a:r>
+              <a:rPr sz="900" b="0">
+                <a:solidFill>
+                  <a:srgbClr val="333333"/>
+                </a:solidFill>
+                <a:latin typeface="Calibri"/>
+              </a:rPr>
+              <a:t>В2 — встраивание</a:t>
+            </a:r>
+          </a:p>
+        </p:txBody>
+      </p:sp>
+      <p:sp>
+        <p:nvSpPr>
+          <p:cNvPr id="17" name="Rounded Rectangle 16"/>
+          <p:cNvSpPr/>
+          <p:nvPr/>
+        </p:nvSpPr>
+        <p:spPr>
+          <a:xfrm>
+            <a:off x="8686800" y="2121408"/>
+            <a:ext cx="2926080" cy="201168"/>
+          </a:xfrm>
+          <a:prstGeom prst="roundRect">
+            <a:avLst/>
+          </a:prstGeom>
+          <a:solidFill>
+            <a:srgbClr val="E8EEF4"/>
+          </a:solidFill>
+          <a:ln>
+            <a:solidFill>
+              <a:srgbClr val="CCCCCC"/>
+            </a:solidFill>
+          </a:ln>
+        </p:spPr>
+        <p:style>
+          <a:lnRef idx="1">
+            <a:schemeClr val="accent1"/>
+          </a:lnRef>
+          <a:fillRef idx="3">
+            <a:schemeClr val="accent1"/>
+          </a:fillRef>
+          <a:effectRef idx="2">
+            <a:schemeClr val="accent1"/>
+          </a:effectRef>
+          <a:fontRef idx="minor">
+            <a:schemeClr val="lt1"/>
+          </a:fontRef>
+        </p:style>
+        <p:txBody>
+          <a:bodyPr rtlCol="0" anchor="ctr"/>
+          <a:lstStyle/>
+          <a:p>
+            <a:pPr algn="ctr"/>
+          </a:p>
+        </p:txBody>
+      </p:sp>
+      <p:sp>
+        <p:nvSpPr>
+          <p:cNvPr id="18" name="Rounded Rectangle 17"/>
+          <p:cNvSpPr/>
+          <p:nvPr/>
+        </p:nvSpPr>
+        <p:spPr>
+          <a:xfrm>
+            <a:off x="8686800" y="2121408"/>
+            <a:ext cx="1833676" cy="201168"/>
+          </a:xfrm>
+          <a:prstGeom prst="roundRect">
+            <a:avLst/>
+          </a:prstGeom>
+          <a:solidFill>
+            <a:srgbClr val="E67E22"/>
+          </a:solidFill>
+          <a:ln>
+            <a:noFill/>
+          </a:ln>
+        </p:spPr>
+        <p:style>
+          <a:lnRef idx="1">
+            <a:schemeClr val="accent1"/>
+          </a:lnRef>
+          <a:fillRef idx="3">
+            <a:schemeClr val="accent1"/>
+          </a:fillRef>
+          <a:effectRef idx="2">
+            <a:schemeClr val="accent1"/>
+          </a:effectRef>
+          <a:fontRef idx="minor">
+            <a:schemeClr val="lt1"/>
+          </a:fontRef>
+        </p:style>
+        <p:txBody>
+          <a:bodyPr rtlCol="0" anchor="ctr"/>
+          <a:lstStyle/>
+          <a:p>
+            <a:pPr algn="ctr"/>
+          </a:p>
+        </p:txBody>
+      </p:sp>
+      <p:sp>
+        <p:nvSpPr>
+          <p:cNvPr id="19" name="TextBox 18"/>
+          <p:cNvSpPr txBox="1"/>
+          <p:nvPr/>
+        </p:nvSpPr>
+        <p:spPr>
+          <a:xfrm>
+            <a:off x="11704320" y="2075688"/>
+            <a:ext cx="822960" cy="320040"/>
+          </a:xfrm>
+          <a:prstGeom prst="rect">
+            <a:avLst/>
+          </a:prstGeom>
+          <a:noFill/>
+        </p:spPr>
+        <p:txBody>
+          <a:bodyPr wrap="none">
+            <a:spAutoFit/>
+          </a:bodyPr>
+          <a:lstStyle/>
+          <a:p>
+            <a:r>
+              <a:rPr sz="1000" b="1">
+                <a:solidFill>
+                  <a:srgbClr val="E67E22"/>
+                </a:solidFill>
+                <a:latin typeface="Calibri"/>
+              </a:rPr>
+              <a:t>3.1/5</a:t>
+            </a:r>
+          </a:p>
+        </p:txBody>
+      </p:sp>
+      <p:sp>
+        <p:nvSpPr>
+          <p:cNvPr id="20" name="TextBox 19"/>
+          <p:cNvSpPr txBox="1"/>
+          <p:nvPr/>
+        </p:nvSpPr>
+        <p:spPr>
+          <a:xfrm>
+            <a:off x="7589520" y="2734056"/>
+            <a:ext cx="1005840" cy="320040"/>
+          </a:xfrm>
+          <a:prstGeom prst="rect">
+            <a:avLst/>
+          </a:prstGeom>
+          <a:noFill/>
+        </p:spPr>
+        <p:txBody>
+          <a:bodyPr wrap="none">
+            <a:spAutoFit/>
+          </a:bodyPr>
+          <a:lstStyle/>
+          <a:p>
+            <a:r>
+              <a:rPr sz="900" b="0">
+                <a:solidFill>
+                  <a:srgbClr val="333333"/>
+                </a:solidFill>
+                <a:latin typeface="Calibri"/>
+              </a:rPr>
+              <a:t>В3 — интеграция</a:t>
+            </a:r>
+          </a:p>
+        </p:txBody>
+      </p:sp>
+      <p:sp>
+        <p:nvSpPr>
+          <p:cNvPr id="21" name="Rounded Rectangle 20"/>
+          <p:cNvSpPr/>
+          <p:nvPr/>
+        </p:nvSpPr>
+        <p:spPr>
+          <a:xfrm>
+            <a:off x="8686800" y="2779776"/>
+            <a:ext cx="2926080" cy="201168"/>
+          </a:xfrm>
+          <a:prstGeom prst="roundRect">
+            <a:avLst/>
+          </a:prstGeom>
+          <a:solidFill>
+            <a:srgbClr val="E8EEF4"/>
+          </a:solidFill>
+          <a:ln>
+            <a:solidFill>
+              <a:srgbClr val="CCCCCC"/>
+            </a:solidFill>
+          </a:ln>
+        </p:spPr>
+        <p:style>
+          <a:lnRef idx="1">
+            <a:schemeClr val="accent1"/>
+          </a:lnRef>
+          <a:fillRef idx="3">
+            <a:schemeClr val="accent1"/>
+          </a:fillRef>
+          <a:effectRef idx="2">
+            <a:schemeClr val="accent1"/>
+          </a:effectRef>
+          <a:fontRef idx="minor">
+            <a:schemeClr val="lt1"/>
+          </a:fontRef>
+        </p:style>
+        <p:txBody>
+          <a:bodyPr rtlCol="0" anchor="ctr"/>
+          <a:lstStyle/>
+          <a:p>
+            <a:pPr algn="ctr"/>
+          </a:p>
+        </p:txBody>
+      </p:sp>
+      <p:sp>
+        <p:nvSpPr>
+          <p:cNvPr id="22" name="Rounded Rectangle 21"/>
+          <p:cNvSpPr/>
+          <p:nvPr/>
+        </p:nvSpPr>
+        <p:spPr>
+          <a:xfrm>
+            <a:off x="8686800" y="2779776"/>
+            <a:ext cx="2178304" cy="201168"/>
+          </a:xfrm>
+          <a:prstGeom prst="roundRect">
+            <a:avLst/>
+          </a:prstGeom>
+          <a:solidFill>
+            <a:srgbClr val="1B7A3A"/>
+          </a:solidFill>
+          <a:ln>
+            <a:noFill/>
+          </a:ln>
+        </p:spPr>
+        <p:style>
+          <a:lnRef idx="1">
+            <a:schemeClr val="accent1"/>
+          </a:lnRef>
+          <a:fillRef idx="3">
+            <a:schemeClr val="accent1"/>
+          </a:fillRef>
+          <a:effectRef idx="2">
+            <a:schemeClr val="accent1"/>
+          </a:effectRef>
+          <a:fontRef idx="minor">
+            <a:schemeClr val="lt1"/>
+          </a:fontRef>
+        </p:style>
+        <p:txBody>
+          <a:bodyPr rtlCol="0" anchor="ctr"/>
+          <a:lstStyle/>
+          <a:p>
+            <a:pPr algn="ctr"/>
+          </a:p>
+        </p:txBody>
+      </p:sp>
+      <p:sp>
+        <p:nvSpPr>
+          <p:cNvPr id="23" name="TextBox 22"/>
+          <p:cNvSpPr txBox="1"/>
+          <p:nvPr/>
+        </p:nvSpPr>
+        <p:spPr>
+          <a:xfrm>
+            <a:off x="11704320" y="2734056"/>
+            <a:ext cx="822960" cy="320040"/>
+          </a:xfrm>
+          <a:prstGeom prst="rect">
+            <a:avLst/>
+          </a:prstGeom>
+          <a:noFill/>
+        </p:spPr>
+        <p:txBody>
+          <a:bodyPr wrap="none">
+            <a:spAutoFit/>
+          </a:bodyPr>
+          <a:lstStyle/>
+          <a:p>
+            <a:r>
+              <a:rPr sz="1000" b="1">
+                <a:solidFill>
+                  <a:srgbClr val="1B7A3A"/>
+                </a:solidFill>
+                <a:latin typeface="Calibri"/>
+              </a:rPr>
+              <a:t>3.7/5</a:t>
+            </a:r>
+          </a:p>
+        </p:txBody>
+      </p:sp>
+      <p:sp>
+        <p:nvSpPr>
+          <p:cNvPr id="24" name="TextBox 23"/>
+          <p:cNvSpPr txBox="1"/>
+          <p:nvPr/>
+        </p:nvSpPr>
+        <p:spPr>
+          <a:xfrm>
+            <a:off x="7589520" y="3520440"/>
+            <a:ext cx="4206240" cy="1371600"/>
+          </a:xfrm>
+          <a:prstGeom prst="rect">
+            <a:avLst/>
+          </a:prstGeom>
+          <a:noFill/>
+        </p:spPr>
+        <p:txBody>
+          <a:bodyPr wrap="square">
+            <a:spAutoFit/>
+          </a:bodyPr>
+          <a:lstStyle/>
+          <a:p>
+            <a:r>
+              <a:rPr sz="1100" b="1">
+                <a:solidFill>
+                  <a:srgbClr val="003366"/>
+                </a:solidFill>
+                <a:latin typeface="Calibri"/>
+              </a:rPr>
+              <a:t>Рекомендуемые сценарии</a:t>
+            </a:r>
+          </a:p>
+          <a:p>
+            <a:pPr>
+              <a:spcBef>
+                <a:spcPts val="400"/>
+              </a:spcBef>
+            </a:pPr>
+            <a:r>
+              <a:rPr sz="900" b="0">
+                <a:solidFill>
+                  <a:srgbClr val="333333"/>
+                </a:solidFill>
+                <a:latin typeface="Calibri"/>
+              </a:rPr>
+              <a:t>• Краткосрочный старт → Вариант 3</a:t>
+            </a:r>
+          </a:p>
+          <a:p>
+            <a:pPr>
+              <a:spcBef>
+                <a:spcPts val="400"/>
+              </a:spcBef>
+            </a:pPr>
+            <a:r>
+              <a:rPr sz="900" b="0">
+                <a:solidFill>
+                  <a:srgbClr val="333333"/>
+                </a:solidFill>
+                <a:latin typeface="Calibri"/>
+              </a:rPr>
+              <a:t>• Полная консолидация → Вариант 2</a:t>
+            </a:r>
+          </a:p>
+          <a:p>
+            <a:pPr>
+              <a:spcBef>
+                <a:spcPts val="400"/>
+              </a:spcBef>
+            </a:pPr>
+            <a:r>
+              <a:rPr sz="900" b="0">
+                <a:solidFill>
+                  <a:srgbClr val="333333"/>
+                </a:solidFill>
+                <a:latin typeface="Calibri"/>
+              </a:rPr>
+              <a:t>• Стратегическая цель → Вариант 1</a:t>
+            </a:r>
+          </a:p>
+        </p:txBody>
+      </p:sp>
+      <p:sp>
+        <p:nvSpPr>
+          <p:cNvPr id="25" name="Rounded Rectangle 24"/>
+          <p:cNvSpPr/>
+          <p:nvPr/>
+        </p:nvSpPr>
+        <p:spPr>
+          <a:xfrm>
+            <a:off x="365760" y="5349240"/>
+            <a:ext cx="11430000" cy="960120"/>
+          </a:xfrm>
+          <a:prstGeom prst="roundRect">
+            <a:avLst/>
+          </a:prstGeom>
+          <a:solidFill>
+            <a:srgbClr val="E8EEF4"/>
+          </a:solidFill>
+          <a:ln>
+            <a:solidFill>
+              <a:srgbClr val="003366"/>
+            </a:solidFill>
+          </a:ln>
+        </p:spPr>
+        <p:style>
+          <a:lnRef idx="1">
+            <a:schemeClr val="accent1"/>
+          </a:lnRef>
+          <a:fillRef idx="3">
+            <a:schemeClr val="accent1"/>
+          </a:fillRef>
+          <a:effectRef idx="2">
+            <a:schemeClr val="accent1"/>
+          </a:effectRef>
+          <a:fontRef idx="minor">
+            <a:schemeClr val="lt1"/>
+          </a:fontRef>
+        </p:style>
+        <p:txBody>
+          <a:bodyPr rtlCol="0" anchor="ctr"/>
+          <a:lstStyle/>
+          <a:p>
+            <a:pPr algn="ctr"/>
+          </a:p>
+        </p:txBody>
+      </p:sp>
+      <p:sp>
+        <p:nvSpPr>
+          <p:cNvPr id="26" name="TextBox 25"/>
+          <p:cNvSpPr txBox="1"/>
+          <p:nvPr/>
+        </p:nvSpPr>
+        <p:spPr>
+          <a:xfrm>
+            <a:off x="502920" y="5413248"/>
+            <a:ext cx="11155680" cy="841248"/>
+          </a:xfrm>
+          <a:prstGeom prst="rect">
+            <a:avLst/>
+          </a:prstGeom>
+          <a:noFill/>
+        </p:spPr>
+        <p:txBody>
+          <a:bodyPr wrap="square">
+            <a:spAutoFit/>
+          </a:bodyPr>
+          <a:lstStyle/>
+          <a:p>
+            <a:r>
+              <a:rPr sz="900" b="1">
+                <a:solidFill>
+                  <a:srgbClr val="003366"/>
+                </a:solidFill>
+                <a:latin typeface="Calibri"/>
+              </a:rPr>
+              <a:t>Источник оценок:  </a:t>
+            </a:r>
+          </a:p>
+          <a:p>
+            <a:r>
+              <a:rPr sz="800" b="0">
+                <a:solidFill>
+                  <a:srgbClr val="333333"/>
+                </a:solidFill>
+                <a:latin typeface="Calibri"/>
+              </a:rPr>
+              <a:t>Экономичность (ТРЗ) — бэклоги Excel: ЕАРМ-1 = 281,7 ч/д (2_file.OVCeIx), ЕАРМ-2 = 126,6 ч/д (3_file.ekYFFz); В1 — ТРЗ не оценивался, балл 3 (оценочно).  </a:t>
+            </a:r>
+          </a:p>
+          <a:p>
+            <a:r>
+              <a:rPr sz="800" b="0">
+                <a:solidFill>
+                  <a:srgbClr val="333333"/>
+                </a:solidFill>
+                <a:latin typeface="Calibri"/>
+              </a:rPr>
+              <a:t>Остальные критерии — экспертная оценка схем 1-file.feUnSR / 2_file.OVCeIx / 3_file.ekYFFz (шкала 1–5).  </a:t>
+            </a:r>
+          </a:p>
+          <a:p>
+            <a:r>
+              <a:rPr sz="800" b="0">
+                <a:solidFill>
+                  <a:srgbClr val="333333"/>
+                </a:solidFill>
+                <a:latin typeface="Calibri"/>
+              </a:rPr>
+              <a:t>Итог = взвешенное среднее (экономичность ×1,5; риски ×1,3; скорость ×1,2; архитектура ×1,2).</a:t>
             </a:r>
           </a:p>
         </p:txBody>

--- a/docs/presentations/CM_IMA_EAPM_variants_comparison.pptx
+++ b/docs/presentations/CM_IMA_EAPM_variants_comparison.pptx
@@ -26,6 +26,7 @@
     <p:sldId id="274" r:id="rId25"/>
     <p:sldId id="275" r:id="rId26"/>
     <p:sldId id="276" r:id="rId27"/>
+    <p:sldId id="277" r:id="rId28"/>
   </p:sldIdLst>
   <p:sldSz cx="12191695" cy="6858000" type="screen4x3"/>
   <p:notesSz cx="6858000" cy="9144000"/>
@@ -9692,7 +9693,7 @@
                 </a:solidFill>
                 <a:latin typeface="Calibri"/>
               </a:rPr>
-              <a:t>Сводное сравнение вариантов</a:t>
+              <a:t>Сводка по вариантам: особенности, ТРЗ, плюсы и минусы</a:t>
             </a:r>
           </a:p>
         </p:txBody>
@@ -9848,6 +9849,1529 @@
                 <a:latin typeface="Calibri"/>
               </a:rPr>
               <a:t>14</a:t>
+            </a:r>
+          </a:p>
+        </p:txBody>
+      </p:sp>
+      <p:sp>
+        <p:nvSpPr>
+          <p:cNvPr id="9" name="Rounded Rectangle 8"/>
+          <p:cNvSpPr/>
+          <p:nvPr/>
+        </p:nvSpPr>
+        <p:spPr>
+          <a:xfrm>
+            <a:off x="347472" y="932688"/>
+            <a:ext cx="3703320" cy="502920"/>
+          </a:xfrm>
+          <a:prstGeom prst="roundRect">
+            <a:avLst/>
+          </a:prstGeom>
+          <a:solidFill>
+            <a:srgbClr val="0070C0"/>
+          </a:solidFill>
+          <a:ln>
+            <a:noFill/>
+          </a:ln>
+        </p:spPr>
+        <p:style>
+          <a:lnRef idx="1">
+            <a:schemeClr val="accent1"/>
+          </a:lnRef>
+          <a:fillRef idx="3">
+            <a:schemeClr val="accent1"/>
+          </a:fillRef>
+          <a:effectRef idx="2">
+            <a:schemeClr val="accent1"/>
+          </a:effectRef>
+          <a:fontRef idx="minor">
+            <a:schemeClr val="lt1"/>
+          </a:fontRef>
+        </p:style>
+        <p:txBody>
+          <a:bodyPr rtlCol="0" anchor="ctr"/>
+          <a:lstStyle/>
+          <a:p>
+            <a:pPr algn="ctr"/>
+          </a:p>
+        </p:txBody>
+      </p:sp>
+      <p:sp>
+        <p:nvSpPr>
+          <p:cNvPr id="10" name="TextBox 9"/>
+          <p:cNvSpPr txBox="1"/>
+          <p:nvPr/>
+        </p:nvSpPr>
+        <p:spPr>
+          <a:xfrm>
+            <a:off x="347472" y="987552"/>
+            <a:ext cx="3703320" cy="411480"/>
+          </a:xfrm>
+          <a:prstGeom prst="rect">
+            <a:avLst/>
+          </a:prstGeom>
+          <a:noFill/>
+        </p:spPr>
+        <p:txBody>
+          <a:bodyPr wrap="none">
+            <a:spAutoFit/>
+          </a:bodyPr>
+          <a:lstStyle/>
+          <a:p>
+            <a:pPr algn="ctr"/>
+            <a:r>
+              <a:rPr sz="1000" b="1">
+                <a:solidFill>
+                  <a:srgbClr val="FFFFFF"/>
+                </a:solidFill>
+                <a:latin typeface="Calibri"/>
+              </a:rPr>
+              <a:t>Вариант 1
+Целевой перенос</a:t>
+            </a:r>
+          </a:p>
+        </p:txBody>
+      </p:sp>
+      <p:sp>
+        <p:nvSpPr>
+          <p:cNvPr id="11" name="Rounded Rectangle 10"/>
+          <p:cNvSpPr/>
+          <p:nvPr/>
+        </p:nvSpPr>
+        <p:spPr>
+          <a:xfrm>
+            <a:off x="347472" y="1435608"/>
+            <a:ext cx="3703320" cy="4754880"/>
+          </a:xfrm>
+          <a:prstGeom prst="roundRect">
+            <a:avLst/>
+          </a:prstGeom>
+          <a:solidFill>
+            <a:srgbClr val="FFFFFF"/>
+          </a:solidFill>
+          <a:ln>
+            <a:solidFill>
+              <a:srgbClr val="0070C0"/>
+            </a:solidFill>
+          </a:ln>
+        </p:spPr>
+        <p:style>
+          <a:lnRef idx="1">
+            <a:schemeClr val="accent1"/>
+          </a:lnRef>
+          <a:fillRef idx="3">
+            <a:schemeClr val="accent1"/>
+          </a:fillRef>
+          <a:effectRef idx="2">
+            <a:schemeClr val="accent1"/>
+          </a:effectRef>
+          <a:fontRef idx="minor">
+            <a:schemeClr val="lt1"/>
+          </a:fontRef>
+        </p:style>
+        <p:txBody>
+          <a:bodyPr rtlCol="0" anchor="ctr"/>
+          <a:lstStyle/>
+          <a:p>
+            <a:pPr algn="ctr"/>
+          </a:p>
+        </p:txBody>
+      </p:sp>
+      <p:sp>
+        <p:nvSpPr>
+          <p:cNvPr id="12" name="TextBox 11"/>
+          <p:cNvSpPr txBox="1"/>
+          <p:nvPr/>
+        </p:nvSpPr>
+        <p:spPr>
+          <a:xfrm>
+            <a:off x="457200" y="1499616"/>
+            <a:ext cx="3483864" cy="4617720"/>
+          </a:xfrm>
+          <a:prstGeom prst="rect">
+            <a:avLst/>
+          </a:prstGeom>
+          <a:noFill/>
+        </p:spPr>
+        <p:txBody>
+          <a:bodyPr wrap="none">
+            <a:spAutoFit/>
+          </a:bodyPr>
+          <a:lstStyle/>
+          <a:p>
+            <a:pPr>
+              <a:spcBef>
+                <a:spcPts val="500"/>
+              </a:spcBef>
+            </a:pPr>
+            <a:r>
+              <a:rPr sz="900" b="1">
+                <a:solidFill>
+                  <a:srgbClr val="003366"/>
+                </a:solidFill>
+                <a:latin typeface="Calibri"/>
+              </a:rPr>
+              <a:t>ТРЗ</a:t>
+            </a:r>
+          </a:p>
+          <a:p>
+            <a:r>
+              <a:rPr sz="800" b="0">
+                <a:solidFill>
+                  <a:srgbClr val="333333"/>
+                </a:solidFill>
+                <a:latin typeface="Calibri"/>
+              </a:rPr>
+              <a:t>Не оценивался</a:t>
+            </a:r>
+          </a:p>
+          <a:p>
+            <a:pPr>
+              <a:spcBef>
+                <a:spcPts val="500"/>
+              </a:spcBef>
+            </a:pPr>
+            <a:r>
+              <a:rPr sz="900" b="1">
+                <a:solidFill>
+                  <a:srgbClr val="0070C0"/>
+                </a:solidFill>
+                <a:latin typeface="Calibri"/>
+              </a:rPr>
+              <a:t>Особенности</a:t>
+            </a:r>
+          </a:p>
+          <a:p>
+            <a:pPr>
+              <a:spcBef>
+                <a:spcPts val="100"/>
+              </a:spcBef>
+            </a:pPr>
+            <a:r>
+              <a:rPr sz="800" b="0">
+                <a:solidFill>
+                  <a:srgbClr val="333333"/>
+                </a:solidFill>
+                <a:latin typeface="Calibri"/>
+              </a:rPr>
+              <a:t>• Оркестрация в Airflow ЕАРМ</a:t>
+            </a:r>
+          </a:p>
+          <a:p>
+            <a:pPr>
+              <a:spcBef>
+                <a:spcPts val="100"/>
+              </a:spcBef>
+            </a:pPr>
+            <a:r>
+              <a:rPr sz="800" b="0">
+                <a:solidFill>
+                  <a:srgbClr val="333333"/>
+                </a:solidFill>
+                <a:latin typeface="Calibri"/>
+              </a:rPr>
+              <a:t>• Песочница MVP для моделей</a:t>
+            </a:r>
+          </a:p>
+          <a:p>
+            <a:pPr>
+              <a:spcBef>
+                <a:spcPts val="100"/>
+              </a:spcBef>
+            </a:pPr>
+            <a:r>
+              <a:rPr sz="800" b="0">
+                <a:solidFill>
+                  <a:srgbClr val="333333"/>
+                </a:solidFill>
+                <a:latin typeface="Calibri"/>
+              </a:rPr>
+              <a:t>• Перенос компонентов из ЦМ ИМА БРД</a:t>
+            </a:r>
+          </a:p>
+          <a:p>
+            <a:pPr>
+              <a:spcBef>
+                <a:spcPts val="100"/>
+              </a:spcBef>
+            </a:pPr>
+            <a:r>
+              <a:rPr sz="800" b="0">
+                <a:solidFill>
+                  <a:srgbClr val="333333"/>
+                </a:solidFill>
+                <a:latin typeface="Calibri"/>
+              </a:rPr>
+              <a:t>• Единая точка входа для ДО</a:t>
+            </a:r>
+          </a:p>
+          <a:p>
+            <a:pPr>
+              <a:spcBef>
+                <a:spcPts val="500"/>
+              </a:spcBef>
+            </a:pPr>
+            <a:r>
+              <a:rPr sz="900" b="1">
+                <a:solidFill>
+                  <a:srgbClr val="1B7A3A"/>
+                </a:solidFill>
+                <a:latin typeface="Calibri"/>
+              </a:rPr>
+              <a:t>Плюсы</a:t>
+            </a:r>
+          </a:p>
+          <a:p>
+            <a:pPr>
+              <a:spcBef>
+                <a:spcPts val="100"/>
+              </a:spcBef>
+            </a:pPr>
+            <a:r>
+              <a:rPr sz="800" b="0">
+                <a:solidFill>
+                  <a:srgbClr val="333333"/>
+                </a:solidFill>
+                <a:latin typeface="Calibri"/>
+              </a:rPr>
+              <a:t>• Единая целевая платформа</a:t>
+            </a:r>
+          </a:p>
+          <a:p>
+            <a:pPr>
+              <a:spcBef>
+                <a:spcPts val="100"/>
+              </a:spcBef>
+            </a:pPr>
+            <a:r>
+              <a:rPr sz="800" b="0">
+                <a:solidFill>
+                  <a:srgbClr val="333333"/>
+                </a:solidFill>
+                <a:latin typeface="Calibri"/>
+              </a:rPr>
+              <a:t>• Централизация ТМ и расчётов</a:t>
+            </a:r>
+          </a:p>
+          <a:p>
+            <a:pPr>
+              <a:spcBef>
+                <a:spcPts val="100"/>
+              </a:spcBef>
+            </a:pPr>
+            <a:r>
+              <a:rPr sz="800" b="0">
+                <a:solidFill>
+                  <a:srgbClr val="333333"/>
+                </a:solidFill>
+                <a:latin typeface="Calibri"/>
+              </a:rPr>
+              <a:t>• Соответствие целевому ландшафту</a:t>
+            </a:r>
+          </a:p>
+          <a:p>
+            <a:pPr>
+              <a:spcBef>
+                <a:spcPts val="500"/>
+              </a:spcBef>
+            </a:pPr>
+            <a:r>
+              <a:rPr sz="900" b="1">
+                <a:solidFill>
+                  <a:srgbClr val="C00000"/>
+                </a:solidFill>
+                <a:latin typeface="Calibri"/>
+              </a:rPr>
+              <a:t>Минусы</a:t>
+            </a:r>
+          </a:p>
+          <a:p>
+            <a:pPr>
+              <a:spcBef>
+                <a:spcPts val="100"/>
+              </a:spcBef>
+            </a:pPr>
+            <a:r>
+              <a:rPr sz="800" b="0">
+                <a:solidFill>
+                  <a:srgbClr val="333333"/>
+                </a:solidFill>
+                <a:latin typeface="Calibri"/>
+              </a:rPr>
+              <a:t>• Максимальный объём изменений</a:t>
+            </a:r>
+          </a:p>
+          <a:p>
+            <a:pPr>
+              <a:spcBef>
+                <a:spcPts val="100"/>
+              </a:spcBef>
+            </a:pPr>
+            <a:r>
+              <a:rPr sz="800" b="0">
+                <a:solidFill>
+                  <a:srgbClr val="333333"/>
+                </a:solidFill>
+                <a:latin typeface="Calibri"/>
+              </a:rPr>
+              <a:t>• ТРЗ требует отдельной оценки</a:t>
+            </a:r>
+          </a:p>
+          <a:p>
+            <a:pPr>
+              <a:spcBef>
+                <a:spcPts val="100"/>
+              </a:spcBef>
+            </a:pPr>
+            <a:r>
+              <a:rPr sz="800" b="0">
+                <a:solidFill>
+                  <a:srgbClr val="333333"/>
+                </a:solidFill>
+                <a:latin typeface="Calibri"/>
+              </a:rPr>
+              <a:t>• Длительный переходный период</a:t>
+            </a:r>
+          </a:p>
+          <a:p>
+            <a:pPr>
+              <a:spcBef>
+                <a:spcPts val="600"/>
+              </a:spcBef>
+            </a:pPr>
+            <a:r>
+              <a:rPr sz="700" b="0">
+                <a:solidFill>
+                  <a:srgbClr val="666666"/>
+                </a:solidFill>
+                <a:latin typeface="Calibri"/>
+              </a:rPr>
+              <a:t>Источник: 1-file.feUnSR</a:t>
+            </a:r>
+          </a:p>
+        </p:txBody>
+      </p:sp>
+      <p:sp>
+        <p:nvSpPr>
+          <p:cNvPr id="13" name="Rounded Rectangle 12"/>
+          <p:cNvSpPr/>
+          <p:nvPr/>
+        </p:nvSpPr>
+        <p:spPr>
+          <a:xfrm>
+            <a:off x="4160520" y="932688"/>
+            <a:ext cx="3703320" cy="502920"/>
+          </a:xfrm>
+          <a:prstGeom prst="roundRect">
+            <a:avLst/>
+          </a:prstGeom>
+          <a:solidFill>
+            <a:srgbClr val="E67E22"/>
+          </a:solidFill>
+          <a:ln>
+            <a:noFill/>
+          </a:ln>
+        </p:spPr>
+        <p:style>
+          <a:lnRef idx="1">
+            <a:schemeClr val="accent1"/>
+          </a:lnRef>
+          <a:fillRef idx="3">
+            <a:schemeClr val="accent1"/>
+          </a:fillRef>
+          <a:effectRef idx="2">
+            <a:schemeClr val="accent1"/>
+          </a:effectRef>
+          <a:fontRef idx="minor">
+            <a:schemeClr val="lt1"/>
+          </a:fontRef>
+        </p:style>
+        <p:txBody>
+          <a:bodyPr rtlCol="0" anchor="ctr"/>
+          <a:lstStyle/>
+          <a:p>
+            <a:pPr algn="ctr"/>
+          </a:p>
+        </p:txBody>
+      </p:sp>
+      <p:sp>
+        <p:nvSpPr>
+          <p:cNvPr id="14" name="TextBox 13"/>
+          <p:cNvSpPr txBox="1"/>
+          <p:nvPr/>
+        </p:nvSpPr>
+        <p:spPr>
+          <a:xfrm>
+            <a:off x="4160520" y="987552"/>
+            <a:ext cx="3703320" cy="411480"/>
+          </a:xfrm>
+          <a:prstGeom prst="rect">
+            <a:avLst/>
+          </a:prstGeom>
+          <a:noFill/>
+        </p:spPr>
+        <p:txBody>
+          <a:bodyPr wrap="none">
+            <a:spAutoFit/>
+          </a:bodyPr>
+          <a:lstStyle/>
+          <a:p>
+            <a:pPr algn="ctr"/>
+            <a:r>
+              <a:rPr sz="1000" b="1">
+                <a:solidFill>
+                  <a:srgbClr val="FFFFFF"/>
+                </a:solidFill>
+                <a:latin typeface="Calibri"/>
+              </a:rPr>
+              <a:t>Вариант 2
+Встраивание (ЕАРМ-1)</a:t>
+            </a:r>
+          </a:p>
+        </p:txBody>
+      </p:sp>
+      <p:sp>
+        <p:nvSpPr>
+          <p:cNvPr id="15" name="Rounded Rectangle 14"/>
+          <p:cNvSpPr/>
+          <p:nvPr/>
+        </p:nvSpPr>
+        <p:spPr>
+          <a:xfrm>
+            <a:off x="4160520" y="1435608"/>
+            <a:ext cx="3703320" cy="4754880"/>
+          </a:xfrm>
+          <a:prstGeom prst="roundRect">
+            <a:avLst/>
+          </a:prstGeom>
+          <a:solidFill>
+            <a:srgbClr val="FFFFFF"/>
+          </a:solidFill>
+          <a:ln>
+            <a:solidFill>
+              <a:srgbClr val="E67E22"/>
+            </a:solidFill>
+          </a:ln>
+        </p:spPr>
+        <p:style>
+          <a:lnRef idx="1">
+            <a:schemeClr val="accent1"/>
+          </a:lnRef>
+          <a:fillRef idx="3">
+            <a:schemeClr val="accent1"/>
+          </a:fillRef>
+          <a:effectRef idx="2">
+            <a:schemeClr val="accent1"/>
+          </a:effectRef>
+          <a:fontRef idx="minor">
+            <a:schemeClr val="lt1"/>
+          </a:fontRef>
+        </p:style>
+        <p:txBody>
+          <a:bodyPr rtlCol="0" anchor="ctr"/>
+          <a:lstStyle/>
+          <a:p>
+            <a:pPr algn="ctr"/>
+          </a:p>
+        </p:txBody>
+      </p:sp>
+      <p:sp>
+        <p:nvSpPr>
+          <p:cNvPr id="16" name="TextBox 15"/>
+          <p:cNvSpPr txBox="1"/>
+          <p:nvPr/>
+        </p:nvSpPr>
+        <p:spPr>
+          <a:xfrm>
+            <a:off x="4270248" y="1499616"/>
+            <a:ext cx="3483864" cy="4617720"/>
+          </a:xfrm>
+          <a:prstGeom prst="rect">
+            <a:avLst/>
+          </a:prstGeom>
+          <a:noFill/>
+        </p:spPr>
+        <p:txBody>
+          <a:bodyPr wrap="none">
+            <a:spAutoFit/>
+          </a:bodyPr>
+          <a:lstStyle/>
+          <a:p>
+            <a:pPr>
+              <a:spcBef>
+                <a:spcPts val="500"/>
+              </a:spcBef>
+            </a:pPr>
+            <a:r>
+              <a:rPr sz="900" b="1">
+                <a:solidFill>
+                  <a:srgbClr val="003366"/>
+                </a:solidFill>
+                <a:latin typeface="Calibri"/>
+              </a:rPr>
+              <a:t>ТРЗ</a:t>
+            </a:r>
+          </a:p>
+          <a:p>
+            <a:r>
+              <a:rPr sz="800" b="0">
+                <a:solidFill>
+                  <a:srgbClr val="333333"/>
+                </a:solidFill>
+                <a:latin typeface="Calibri"/>
+              </a:rPr>
+              <a:t>281,70 ч/д (без риска)
+221,50 ч/д (с риском)</a:t>
+            </a:r>
+          </a:p>
+          <a:p>
+            <a:pPr>
+              <a:spcBef>
+                <a:spcPts val="500"/>
+              </a:spcBef>
+            </a:pPr>
+            <a:r>
+              <a:rPr sz="900" b="1">
+                <a:solidFill>
+                  <a:srgbClr val="E67E22"/>
+                </a:solidFill>
+                <a:latin typeface="Calibri"/>
+              </a:rPr>
+              <a:t>Особенности</a:t>
+            </a:r>
+          </a:p>
+          <a:p>
+            <a:pPr>
+              <a:spcBef>
+                <a:spcPts val="100"/>
+              </a:spcBef>
+            </a:pPr>
+            <a:r>
+              <a:rPr sz="800" b="0">
+                <a:solidFill>
+                  <a:srgbClr val="333333"/>
+                </a:solidFill>
+                <a:latin typeface="Calibri"/>
+              </a:rPr>
+              <a:t>• Перенос стека CH, PG, Airflow, NiFi…</a:t>
+            </a:r>
+          </a:p>
+          <a:p>
+            <a:pPr>
+              <a:spcBef>
+                <a:spcPts val="100"/>
+              </a:spcBef>
+            </a:pPr>
+            <a:r>
+              <a:rPr sz="800" b="0">
+                <a:solidFill>
+                  <a:srgbClr val="333333"/>
+                </a:solidFill>
+                <a:latin typeface="Calibri"/>
+              </a:rPr>
+              <a:t>• Миграция дампов и CI/CD</a:t>
+            </a:r>
+          </a:p>
+          <a:p>
+            <a:pPr>
+              <a:spcBef>
+                <a:spcPts val="100"/>
+              </a:spcBef>
+            </a:pPr>
+            <a:r>
+              <a:rPr sz="800" b="0">
+                <a:solidFill>
+                  <a:srgbClr val="333333"/>
+                </a:solidFill>
+                <a:latin typeface="Calibri"/>
+              </a:rPr>
+              <a:t>• Переработка DAG (API, атомарность)</a:t>
+            </a:r>
+          </a:p>
+          <a:p>
+            <a:pPr>
+              <a:spcBef>
+                <a:spcPts val="100"/>
+              </a:spcBef>
+            </a:pPr>
+            <a:r>
+              <a:rPr sz="800" b="0">
+                <a:solidFill>
+                  <a:srgbClr val="333333"/>
+                </a:solidFill>
+                <a:latin typeface="Calibri"/>
+              </a:rPr>
+              <a:t>• Устранение уязвимостей (~134 ч/д)</a:t>
+            </a:r>
+          </a:p>
+          <a:p>
+            <a:pPr>
+              <a:spcBef>
+                <a:spcPts val="500"/>
+              </a:spcBef>
+            </a:pPr>
+            <a:r>
+              <a:rPr sz="900" b="1">
+                <a:solidFill>
+                  <a:srgbClr val="1B7A3A"/>
+                </a:solidFill>
+                <a:latin typeface="Calibri"/>
+              </a:rPr>
+              <a:t>Плюсы</a:t>
+            </a:r>
+          </a:p>
+          <a:p>
+            <a:pPr>
+              <a:spcBef>
+                <a:spcPts val="100"/>
+              </a:spcBef>
+            </a:pPr>
+            <a:r>
+              <a:rPr sz="800" b="0">
+                <a:solidFill>
+                  <a:srgbClr val="333333"/>
+                </a:solidFill>
+                <a:latin typeface="Calibri"/>
+              </a:rPr>
+              <a:t>• Полная консолидация в ЕАРМ</a:t>
+            </a:r>
+          </a:p>
+          <a:p>
+            <a:pPr>
+              <a:spcBef>
+                <a:spcPts val="100"/>
+              </a:spcBef>
+            </a:pPr>
+            <a:r>
+              <a:rPr sz="800" b="0">
+                <a:solidFill>
+                  <a:srgbClr val="333333"/>
+                </a:solidFill>
+                <a:latin typeface="Calibri"/>
+              </a:rPr>
+              <a:t>• Контроль ТМ через NiFi (АДКУ)</a:t>
+            </a:r>
+          </a:p>
+          <a:p>
+            <a:pPr>
+              <a:spcBef>
+                <a:spcPts val="100"/>
+              </a:spcBef>
+            </a:pPr>
+            <a:r>
+              <a:rPr sz="800" b="0">
+                <a:solidFill>
+                  <a:srgbClr val="333333"/>
+                </a:solidFill>
+                <a:latin typeface="Calibri"/>
+              </a:rPr>
+              <a:t>• Grafana в frontend ЕАРМ</a:t>
+            </a:r>
+          </a:p>
+          <a:p>
+            <a:pPr>
+              <a:spcBef>
+                <a:spcPts val="500"/>
+              </a:spcBef>
+            </a:pPr>
+            <a:r>
+              <a:rPr sz="900" b="1">
+                <a:solidFill>
+                  <a:srgbClr val="C00000"/>
+                </a:solidFill>
+                <a:latin typeface="Calibri"/>
+              </a:rPr>
+              <a:t>Минусы</a:t>
+            </a:r>
+          </a:p>
+          <a:p>
+            <a:pPr>
+              <a:spcBef>
+                <a:spcPts val="100"/>
+              </a:spcBef>
+            </a:pPr>
+            <a:r>
+              <a:rPr sz="800" b="0">
+                <a:solidFill>
+                  <a:srgbClr val="333333"/>
+                </a:solidFill>
+                <a:latin typeface="Calibri"/>
+              </a:rPr>
+              <a:t>• Максимальные ТРЗ (~282 ч/д)</a:t>
+            </a:r>
+          </a:p>
+          <a:p>
+            <a:pPr>
+              <a:spcBef>
+                <a:spcPts val="100"/>
+              </a:spcBef>
+            </a:pPr>
+            <a:r>
+              <a:rPr sz="800" b="0">
+                <a:solidFill>
+                  <a:srgbClr val="333333"/>
+                </a:solidFill>
+                <a:latin typeface="Calibri"/>
+              </a:rPr>
+              <a:t>• Риски при переносе prod-данных</a:t>
+            </a:r>
+          </a:p>
+          <a:p>
+            <a:pPr>
+              <a:spcBef>
+                <a:spcPts val="100"/>
+              </a:spcBef>
+            </a:pPr>
+            <a:r>
+              <a:rPr sz="800" b="0">
+                <a:solidFill>
+                  <a:srgbClr val="333333"/>
+                </a:solidFill>
+                <a:latin typeface="Calibri"/>
+              </a:rPr>
+              <a:t>• Высокие затраты на миграцию</a:t>
+            </a:r>
+          </a:p>
+          <a:p>
+            <a:pPr>
+              <a:spcBef>
+                <a:spcPts val="600"/>
+              </a:spcBef>
+            </a:pPr>
+            <a:r>
+              <a:rPr sz="700" b="0">
+                <a:solidFill>
+                  <a:srgbClr val="666666"/>
+                </a:solidFill>
+                <a:latin typeface="Calibri"/>
+              </a:rPr>
+              <a:t>Источник: 2_file.OVCeIx</a:t>
+            </a:r>
+          </a:p>
+        </p:txBody>
+      </p:sp>
+      <p:sp>
+        <p:nvSpPr>
+          <p:cNvPr id="17" name="Rounded Rectangle 16"/>
+          <p:cNvSpPr/>
+          <p:nvPr/>
+        </p:nvSpPr>
+        <p:spPr>
+          <a:xfrm>
+            <a:off x="7973568" y="932688"/>
+            <a:ext cx="3703320" cy="502920"/>
+          </a:xfrm>
+          <a:prstGeom prst="roundRect">
+            <a:avLst/>
+          </a:prstGeom>
+          <a:solidFill>
+            <a:srgbClr val="1B7A3A"/>
+          </a:solidFill>
+          <a:ln>
+            <a:noFill/>
+          </a:ln>
+        </p:spPr>
+        <p:style>
+          <a:lnRef idx="1">
+            <a:schemeClr val="accent1"/>
+          </a:lnRef>
+          <a:fillRef idx="3">
+            <a:schemeClr val="accent1"/>
+          </a:fillRef>
+          <a:effectRef idx="2">
+            <a:schemeClr val="accent1"/>
+          </a:effectRef>
+          <a:fontRef idx="minor">
+            <a:schemeClr val="lt1"/>
+          </a:fontRef>
+        </p:style>
+        <p:txBody>
+          <a:bodyPr rtlCol="0" anchor="ctr"/>
+          <a:lstStyle/>
+          <a:p>
+            <a:pPr algn="ctr"/>
+          </a:p>
+        </p:txBody>
+      </p:sp>
+      <p:sp>
+        <p:nvSpPr>
+          <p:cNvPr id="18" name="TextBox 17"/>
+          <p:cNvSpPr txBox="1"/>
+          <p:nvPr/>
+        </p:nvSpPr>
+        <p:spPr>
+          <a:xfrm>
+            <a:off x="7973568" y="987552"/>
+            <a:ext cx="3703320" cy="411480"/>
+          </a:xfrm>
+          <a:prstGeom prst="rect">
+            <a:avLst/>
+          </a:prstGeom>
+          <a:noFill/>
+        </p:spPr>
+        <p:txBody>
+          <a:bodyPr wrap="none">
+            <a:spAutoFit/>
+          </a:bodyPr>
+          <a:lstStyle/>
+          <a:p>
+            <a:pPr algn="ctr"/>
+            <a:r>
+              <a:rPr sz="1000" b="1">
+                <a:solidFill>
+                  <a:srgbClr val="FFFFFF"/>
+                </a:solidFill>
+                <a:latin typeface="Calibri"/>
+              </a:rPr>
+              <a:t>Вариант 3
+Интеграция (ЕАРМ-2)</a:t>
+            </a:r>
+          </a:p>
+        </p:txBody>
+      </p:sp>
+      <p:sp>
+        <p:nvSpPr>
+          <p:cNvPr id="19" name="Rounded Rectangle 18"/>
+          <p:cNvSpPr/>
+          <p:nvPr/>
+        </p:nvSpPr>
+        <p:spPr>
+          <a:xfrm>
+            <a:off x="7973568" y="1435608"/>
+            <a:ext cx="3703320" cy="4754880"/>
+          </a:xfrm>
+          <a:prstGeom prst="roundRect">
+            <a:avLst/>
+          </a:prstGeom>
+          <a:solidFill>
+            <a:srgbClr val="FFFFFF"/>
+          </a:solidFill>
+          <a:ln>
+            <a:solidFill>
+              <a:srgbClr val="1B7A3A"/>
+            </a:solidFill>
+          </a:ln>
+        </p:spPr>
+        <p:style>
+          <a:lnRef idx="1">
+            <a:schemeClr val="accent1"/>
+          </a:lnRef>
+          <a:fillRef idx="3">
+            <a:schemeClr val="accent1"/>
+          </a:fillRef>
+          <a:effectRef idx="2">
+            <a:schemeClr val="accent1"/>
+          </a:effectRef>
+          <a:fontRef idx="minor">
+            <a:schemeClr val="lt1"/>
+          </a:fontRef>
+        </p:style>
+        <p:txBody>
+          <a:bodyPr rtlCol="0" anchor="ctr"/>
+          <a:lstStyle/>
+          <a:p>
+            <a:pPr algn="ctr"/>
+          </a:p>
+        </p:txBody>
+      </p:sp>
+      <p:sp>
+        <p:nvSpPr>
+          <p:cNvPr id="20" name="TextBox 19"/>
+          <p:cNvSpPr txBox="1"/>
+          <p:nvPr/>
+        </p:nvSpPr>
+        <p:spPr>
+          <a:xfrm>
+            <a:off x="8083296" y="1499616"/>
+            <a:ext cx="3483864" cy="4617720"/>
+          </a:xfrm>
+          <a:prstGeom prst="rect">
+            <a:avLst/>
+          </a:prstGeom>
+          <a:noFill/>
+        </p:spPr>
+        <p:txBody>
+          <a:bodyPr wrap="none">
+            <a:spAutoFit/>
+          </a:bodyPr>
+          <a:lstStyle/>
+          <a:p>
+            <a:pPr>
+              <a:spcBef>
+                <a:spcPts val="500"/>
+              </a:spcBef>
+            </a:pPr>
+            <a:r>
+              <a:rPr sz="900" b="1">
+                <a:solidFill>
+                  <a:srgbClr val="003366"/>
+                </a:solidFill>
+                <a:latin typeface="Calibri"/>
+              </a:rPr>
+              <a:t>ТРЗ</a:t>
+            </a:r>
+          </a:p>
+          <a:p>
+            <a:r>
+              <a:rPr sz="800" b="0">
+                <a:solidFill>
+                  <a:srgbClr val="333333"/>
+                </a:solidFill>
+                <a:latin typeface="Calibri"/>
+              </a:rPr>
+              <a:t>126,60 ч/д (без риска)
+135,50 ч/д (с риском)</a:t>
+            </a:r>
+          </a:p>
+          <a:p>
+            <a:pPr>
+              <a:spcBef>
+                <a:spcPts val="500"/>
+              </a:spcBef>
+            </a:pPr>
+            <a:r>
+              <a:rPr sz="900" b="1">
+                <a:solidFill>
+                  <a:srgbClr val="1B7A3A"/>
+                </a:solidFill>
+                <a:latin typeface="Calibri"/>
+              </a:rPr>
+              <a:t>Особенности</a:t>
+            </a:r>
+          </a:p>
+          <a:p>
+            <a:pPr>
+              <a:spcBef>
+                <a:spcPts val="100"/>
+              </a:spcBef>
+            </a:pPr>
+            <a:r>
+              <a:rPr sz="800" b="0">
+                <a:solidFill>
+                  <a:srgbClr val="333333"/>
+                </a:solidFill>
+                <a:latin typeface="Calibri"/>
+              </a:rPr>
+              <a:t>• Вызов расчётов через API AirFlow</a:t>
+            </a:r>
+          </a:p>
+          <a:p>
+            <a:pPr>
+              <a:spcBef>
+                <a:spcPts val="100"/>
+              </a:spcBef>
+            </a:pPr>
+            <a:r>
+              <a:rPr sz="800" b="0">
+                <a:solidFill>
+                  <a:srgbClr val="333333"/>
+                </a:solidFill>
+                <a:latin typeface="Calibri"/>
+              </a:rPr>
+              <a:t>• ТМ: АДКУ → NiFi ЕАРМ → ClickHouse</a:t>
+            </a:r>
+          </a:p>
+          <a:p>
+            <a:pPr>
+              <a:spcBef>
+                <a:spcPts val="100"/>
+              </a:spcBef>
+            </a:pPr>
+            <a:r>
+              <a:rPr sz="800" b="0">
+                <a:solidFill>
+                  <a:srgbClr val="333333"/>
+                </a:solidFill>
+                <a:latin typeface="Calibri"/>
+              </a:rPr>
+              <a:t>• Без переноса стека и дампов</a:t>
+            </a:r>
+          </a:p>
+          <a:p>
+            <a:pPr>
+              <a:spcBef>
+                <a:spcPts val="100"/>
+              </a:spcBef>
+            </a:pPr>
+            <a:r>
+              <a:rPr sz="800" b="0">
+                <a:solidFill>
+                  <a:srgbClr val="333333"/>
+                </a:solidFill>
+                <a:latin typeface="Calibri"/>
+              </a:rPr>
+              <a:t>• ЦМ ИМА — отдельная система</a:t>
+            </a:r>
+          </a:p>
+          <a:p>
+            <a:pPr>
+              <a:spcBef>
+                <a:spcPts val="500"/>
+              </a:spcBef>
+            </a:pPr>
+            <a:r>
+              <a:rPr sz="900" b="1">
+                <a:solidFill>
+                  <a:srgbClr val="1B7A3A"/>
+                </a:solidFill>
+                <a:latin typeface="Calibri"/>
+              </a:rPr>
+              <a:t>Плюсы</a:t>
+            </a:r>
+          </a:p>
+          <a:p>
+            <a:pPr>
+              <a:spcBef>
+                <a:spcPts val="100"/>
+              </a:spcBef>
+            </a:pPr>
+            <a:r>
+              <a:rPr sz="800" b="0">
+                <a:solidFill>
+                  <a:srgbClr val="333333"/>
+                </a:solidFill>
+                <a:latin typeface="Calibri"/>
+              </a:rPr>
+              <a:t>• Минимальные ТРЗ (−55% vs В2)</a:t>
+            </a:r>
+          </a:p>
+          <a:p>
+            <a:pPr>
+              <a:spcBef>
+                <a:spcPts val="100"/>
+              </a:spcBef>
+            </a:pPr>
+            <a:r>
+              <a:rPr sz="800" b="0">
+                <a:solidFill>
+                  <a:srgbClr val="333333"/>
+                </a:solidFill>
+                <a:latin typeface="Calibri"/>
+              </a:rPr>
+              <a:t>• Быстрый выход на интеграцию</a:t>
+            </a:r>
+          </a:p>
+          <a:p>
+            <a:pPr>
+              <a:spcBef>
+                <a:spcPts val="100"/>
+              </a:spcBef>
+            </a:pPr>
+            <a:r>
+              <a:rPr sz="800" b="0">
+                <a:solidFill>
+                  <a:srgbClr val="333333"/>
+                </a:solidFill>
+                <a:latin typeface="Calibri"/>
+              </a:rPr>
+              <a:t>• Сохранение экспертизы ЦМ ИМА</a:t>
+            </a:r>
+          </a:p>
+          <a:p>
+            <a:pPr>
+              <a:spcBef>
+                <a:spcPts val="500"/>
+              </a:spcBef>
+            </a:pPr>
+            <a:r>
+              <a:rPr sz="900" b="1">
+                <a:solidFill>
+                  <a:srgbClr val="C00000"/>
+                </a:solidFill>
+                <a:latin typeface="Calibri"/>
+              </a:rPr>
+              <a:t>Минусы</a:t>
+            </a:r>
+          </a:p>
+          <a:p>
+            <a:pPr>
+              <a:spcBef>
+                <a:spcPts val="100"/>
+              </a:spcBef>
+            </a:pPr>
+            <a:r>
+              <a:rPr sz="800" b="0">
+                <a:solidFill>
+                  <a:srgbClr val="333333"/>
+                </a:solidFill>
+                <a:latin typeface="Calibri"/>
+              </a:rPr>
+              <a:t>• Два контура эксплуатации</a:t>
+            </a:r>
+          </a:p>
+          <a:p>
+            <a:pPr>
+              <a:spcBef>
+                <a:spcPts val="100"/>
+              </a:spcBef>
+            </a:pPr>
+            <a:r>
+              <a:rPr sz="800" b="0">
+                <a:solidFill>
+                  <a:srgbClr val="333333"/>
+                </a:solidFill>
+                <a:latin typeface="Calibri"/>
+              </a:rPr>
+              <a:t>• Зависимость от API-контрактов</a:t>
+            </a:r>
+          </a:p>
+          <a:p>
+            <a:pPr>
+              <a:spcBef>
+                <a:spcPts val="100"/>
+              </a:spcBef>
+            </a:pPr>
+            <a:r>
+              <a:rPr sz="800" b="0">
+                <a:solidFill>
+                  <a:srgbClr val="333333"/>
+                </a:solidFill>
+                <a:latin typeface="Calibri"/>
+              </a:rPr>
+              <a:t>• Риск МСЭ OKD→DH</a:t>
+            </a:r>
+          </a:p>
+          <a:p>
+            <a:pPr>
+              <a:spcBef>
+                <a:spcPts val="600"/>
+              </a:spcBef>
+            </a:pPr>
+            <a:r>
+              <a:rPr sz="700" b="0">
+                <a:solidFill>
+                  <a:srgbClr val="666666"/>
+                </a:solidFill>
+                <a:latin typeface="Calibri"/>
+              </a:rPr>
+              <a:t>Источник: 3_file.ekYFFz</a:t>
+            </a:r>
+          </a:p>
+        </p:txBody>
+      </p:sp>
+      <p:sp>
+        <p:nvSpPr>
+          <p:cNvPr id="21" name="TextBox 20"/>
+          <p:cNvSpPr txBox="1"/>
+          <p:nvPr/>
+        </p:nvSpPr>
+        <p:spPr>
+          <a:xfrm>
+            <a:off x="365760" y="6236208"/>
+            <a:ext cx="11430000" cy="228600"/>
+          </a:xfrm>
+          <a:prstGeom prst="rect">
+            <a:avLst/>
+          </a:prstGeom>
+          <a:noFill/>
+        </p:spPr>
+        <p:txBody>
+          <a:bodyPr wrap="none">
+            <a:spAutoFit/>
+          </a:bodyPr>
+          <a:lstStyle/>
+          <a:p>
+            <a:r>
+              <a:rPr sz="800" b="0">
+                <a:solidFill>
+                  <a:srgbClr val="666666"/>
+                </a:solidFill>
+                <a:latin typeface="Calibri"/>
+              </a:rPr>
+              <a:t>ТРЗ вариантов 2 и 3 — из бэклогов Excel (листы «Бэклог ЦМ ИМА в ЕАРМ-1» и «ЕАРМ-2»)</a:t>
+            </a:r>
+          </a:p>
+        </p:txBody>
+      </p:sp>
+    </p:spTree>
+  </p:cSld>
+  <p:clrMapOvr>
+    <a:masterClrMapping/>
+  </p:clrMapOvr>
+</p:sld>
+</file>
+
+<file path=ppt/slides/slide19.xml><?xml version="1.0" encoding="utf-8"?>
+<p:sld xmlns:a="http://schemas.openxmlformats.org/drawingml/2006/main" xmlns:p="http://schemas.openxmlformats.org/presentationml/2006/main" xmlns:r="http://schemas.openxmlformats.org/officeDocument/2006/relationships">
+  <p:cSld>
+    <p:spTree>
+      <p:nvGrpSpPr>
+        <p:cNvPr id="1" name=""/>
+        <p:cNvGrpSpPr/>
+        <p:nvPr/>
+      </p:nvGrpSpPr>
+      <p:grpSpPr/>
+      <p:sp>
+        <p:nvSpPr>
+          <p:cNvPr id="2" name="Rectangle 1"/>
+          <p:cNvSpPr/>
+          <p:nvPr/>
+        </p:nvSpPr>
+        <p:spPr>
+          <a:xfrm>
+            <a:off x="0" y="0"/>
+            <a:ext cx="12191695" cy="6858000"/>
+          </a:xfrm>
+          <a:prstGeom prst="rect">
+            <a:avLst/>
+          </a:prstGeom>
+          <a:solidFill>
+            <a:srgbClr val="F4F6F8"/>
+          </a:solidFill>
+          <a:ln>
+            <a:noFill/>
+          </a:ln>
+        </p:spPr>
+        <p:style>
+          <a:lnRef idx="1">
+            <a:schemeClr val="accent1"/>
+          </a:lnRef>
+          <a:fillRef idx="3">
+            <a:schemeClr val="accent1"/>
+          </a:fillRef>
+          <a:effectRef idx="2">
+            <a:schemeClr val="accent1"/>
+          </a:effectRef>
+          <a:fontRef idx="minor">
+            <a:schemeClr val="lt1"/>
+          </a:fontRef>
+        </p:style>
+        <p:txBody>
+          <a:bodyPr rtlCol="0" anchor="ctr"/>
+          <a:lstStyle/>
+          <a:p>
+            <a:pPr algn="ctr"/>
+          </a:p>
+        </p:txBody>
+      </p:sp>
+      <p:sp>
+        <p:nvSpPr>
+          <p:cNvPr id="3" name="Rectangle 2"/>
+          <p:cNvSpPr/>
+          <p:nvPr/>
+        </p:nvSpPr>
+        <p:spPr>
+          <a:xfrm>
+            <a:off x="0" y="0"/>
+            <a:ext cx="12191695" cy="658368"/>
+          </a:xfrm>
+          <a:prstGeom prst="rect">
+            <a:avLst/>
+          </a:prstGeom>
+          <a:solidFill>
+            <a:srgbClr val="003366"/>
+          </a:solidFill>
+          <a:ln>
+            <a:noFill/>
+          </a:ln>
+        </p:spPr>
+        <p:style>
+          <a:lnRef idx="1">
+            <a:schemeClr val="accent1"/>
+          </a:lnRef>
+          <a:fillRef idx="3">
+            <a:schemeClr val="accent1"/>
+          </a:fillRef>
+          <a:effectRef idx="2">
+            <a:schemeClr val="accent1"/>
+          </a:effectRef>
+          <a:fontRef idx="minor">
+            <a:schemeClr val="lt1"/>
+          </a:fontRef>
+        </p:style>
+        <p:txBody>
+          <a:bodyPr rtlCol="0" anchor="ctr"/>
+          <a:lstStyle/>
+          <a:p>
+            <a:pPr algn="ctr"/>
+          </a:p>
+        </p:txBody>
+      </p:sp>
+      <p:sp>
+        <p:nvSpPr>
+          <p:cNvPr id="4" name="TextBox 3"/>
+          <p:cNvSpPr txBox="1"/>
+          <p:nvPr/>
+        </p:nvSpPr>
+        <p:spPr>
+          <a:xfrm>
+            <a:off x="502920" y="128016"/>
+            <a:ext cx="10515600" cy="457200"/>
+          </a:xfrm>
+          <a:prstGeom prst="rect">
+            <a:avLst/>
+          </a:prstGeom>
+          <a:noFill/>
+        </p:spPr>
+        <p:txBody>
+          <a:bodyPr wrap="none">
+            <a:spAutoFit/>
+          </a:bodyPr>
+          <a:lstStyle/>
+          <a:p>
+            <a:r>
+              <a:rPr sz="2200" b="1">
+                <a:solidFill>
+                  <a:srgbClr val="FFFFFF"/>
+                </a:solidFill>
+                <a:latin typeface="Calibri"/>
+              </a:rPr>
+              <a:t>Сводное сравнение вариантов</a:t>
+            </a:r>
+          </a:p>
+        </p:txBody>
+      </p:sp>
+      <p:sp>
+        <p:nvSpPr>
+          <p:cNvPr id="5" name="Rectangle 4"/>
+          <p:cNvSpPr/>
+          <p:nvPr/>
+        </p:nvSpPr>
+        <p:spPr>
+          <a:xfrm>
+            <a:off x="0" y="658368"/>
+            <a:ext cx="12191695" cy="36576"/>
+          </a:xfrm>
+          <a:prstGeom prst="rect">
+            <a:avLst/>
+          </a:prstGeom>
+          <a:solidFill>
+            <a:srgbClr val="0070C0"/>
+          </a:solidFill>
+          <a:ln>
+            <a:noFill/>
+          </a:ln>
+        </p:spPr>
+        <p:style>
+          <a:lnRef idx="1">
+            <a:schemeClr val="accent1"/>
+          </a:lnRef>
+          <a:fillRef idx="3">
+            <a:schemeClr val="accent1"/>
+          </a:fillRef>
+          <a:effectRef idx="2">
+            <a:schemeClr val="accent1"/>
+          </a:effectRef>
+          <a:fontRef idx="minor">
+            <a:schemeClr val="lt1"/>
+          </a:fontRef>
+        </p:style>
+        <p:txBody>
+          <a:bodyPr rtlCol="0" anchor="ctr"/>
+          <a:lstStyle/>
+          <a:p>
+            <a:pPr algn="ctr"/>
+          </a:p>
+        </p:txBody>
+      </p:sp>
+      <p:sp>
+        <p:nvSpPr>
+          <p:cNvPr id="6" name="Rectangle 5"/>
+          <p:cNvSpPr/>
+          <p:nvPr/>
+        </p:nvSpPr>
+        <p:spPr>
+          <a:xfrm>
+            <a:off x="457200" y="6446520"/>
+            <a:ext cx="11274552" cy="9144"/>
+          </a:xfrm>
+          <a:prstGeom prst="rect">
+            <a:avLst/>
+          </a:prstGeom>
+          <a:solidFill>
+            <a:srgbClr val="CCCCCC"/>
+          </a:solidFill>
+          <a:ln>
+            <a:noFill/>
+          </a:ln>
+        </p:spPr>
+        <p:style>
+          <a:lnRef idx="1">
+            <a:schemeClr val="accent1"/>
+          </a:lnRef>
+          <a:fillRef idx="3">
+            <a:schemeClr val="accent1"/>
+          </a:fillRef>
+          <a:effectRef idx="2">
+            <a:schemeClr val="accent1"/>
+          </a:effectRef>
+          <a:fontRef idx="minor">
+            <a:schemeClr val="lt1"/>
+          </a:fontRef>
+        </p:style>
+        <p:txBody>
+          <a:bodyPr rtlCol="0" anchor="ctr"/>
+          <a:lstStyle/>
+          <a:p>
+            <a:pPr algn="ctr"/>
+          </a:p>
+        </p:txBody>
+      </p:sp>
+      <p:sp>
+        <p:nvSpPr>
+          <p:cNvPr id="7" name="TextBox 6"/>
+          <p:cNvSpPr txBox="1"/>
+          <p:nvPr/>
+        </p:nvSpPr>
+        <p:spPr>
+          <a:xfrm>
+            <a:off x="502920" y="6510528"/>
+            <a:ext cx="7315200" cy="256032"/>
+          </a:xfrm>
+          <a:prstGeom prst="rect">
+            <a:avLst/>
+          </a:prstGeom>
+          <a:noFill/>
+        </p:spPr>
+        <p:txBody>
+          <a:bodyPr wrap="none">
+            <a:spAutoFit/>
+          </a:bodyPr>
+          <a:lstStyle/>
+          <a:p>
+            <a:r>
+              <a:rPr sz="800" b="0">
+                <a:solidFill>
+                  <a:srgbClr val="666666"/>
+                </a:solidFill>
+                <a:latin typeface="Calibri"/>
+              </a:rPr>
+              <a:t>ЦМ ИМА × ЕАРМ  |  Сравнительный анализ вариантов интеграции</a:t>
+            </a:r>
+          </a:p>
+        </p:txBody>
+      </p:sp>
+      <p:sp>
+        <p:nvSpPr>
+          <p:cNvPr id="8" name="TextBox 7"/>
+          <p:cNvSpPr txBox="1"/>
+          <p:nvPr/>
+        </p:nvSpPr>
+        <p:spPr>
+          <a:xfrm>
+            <a:off x="11155680" y="6492240"/>
+            <a:ext cx="731520" cy="274320"/>
+          </a:xfrm>
+          <a:prstGeom prst="rect">
+            <a:avLst/>
+          </a:prstGeom>
+          <a:noFill/>
+        </p:spPr>
+        <p:txBody>
+          <a:bodyPr wrap="none">
+            <a:spAutoFit/>
+          </a:bodyPr>
+          <a:lstStyle/>
+          <a:p>
+            <a:pPr algn="r"/>
+            <a:r>
+              <a:rPr sz="900" b="0">
+                <a:solidFill>
+                  <a:srgbClr val="666666"/>
+                </a:solidFill>
+                <a:latin typeface="Calibri"/>
+              </a:rPr>
+              <a:t>15</a:t>
             </a:r>
           </a:p>
         </p:txBody>
@@ -10672,7 +12196,7 @@
 </p:sld>
 </file>
 
-<file path=ppt/slides/slide19.xml><?xml version="1.0" encoding="utf-8"?>
+<file path=ppt/slides/slide2.xml><?xml version="1.0" encoding="utf-8"?>
 <p:sld xmlns:a="http://schemas.openxmlformats.org/drawingml/2006/main" xmlns:p="http://schemas.openxmlformats.org/presentationml/2006/main" xmlns:r="http://schemas.openxmlformats.org/officeDocument/2006/relationships">
   <p:cSld>
     <p:spTree>
@@ -10797,7 +12321,7 @@
                 </a:solidFill>
                 <a:latin typeface="Calibri"/>
               </a:rPr>
-              <a:t>Сводная аналитика: рейтинг вариантов</a:t>
+              <a:t>Цель и контекст</a:t>
             </a:r>
           </a:p>
         </p:txBody>
@@ -10952,7 +12476,387 @@
                 </a:solidFill>
                 <a:latin typeface="Calibri"/>
               </a:rPr>
-              <a:t>15</a:t>
+              <a:t>1</a:t>
+            </a:r>
+          </a:p>
+        </p:txBody>
+      </p:sp>
+      <p:sp>
+        <p:nvSpPr>
+          <p:cNvPr id="9" name="TextBox 8"/>
+          <p:cNvSpPr txBox="1"/>
+          <p:nvPr/>
+        </p:nvSpPr>
+        <p:spPr>
+          <a:xfrm>
+            <a:off x="640080" y="868680"/>
+            <a:ext cx="10972800" cy="5349240"/>
+          </a:xfrm>
+          <a:prstGeom prst="rect">
+            <a:avLst/>
+          </a:prstGeom>
+          <a:noFill/>
+        </p:spPr>
+        <p:txBody>
+          <a:bodyPr wrap="square">
+            <a:spAutoFit/>
+          </a:bodyPr>
+          <a:lstStyle/>
+          <a:p>
+            <a:pPr>
+              <a:spcAft>
+                <a:spcPts val="800"/>
+              </a:spcAft>
+            </a:pPr>
+            <a:r>
+              <a:rPr sz="1500" b="0">
+                <a:solidFill>
+                  <a:srgbClr val="333333"/>
+                </a:solidFill>
+                <a:latin typeface="Calibri"/>
+              </a:rPr>
+              <a:t>Обеспечить расчёты моделей ИМА в целевом ландшафте ЕАРМ.</a:t>
+            </a:r>
+          </a:p>
+          <a:p>
+            <a:pPr>
+              <a:spcAft>
+                <a:spcPts val="800"/>
+              </a:spcAft>
+            </a:pPr>
+            <a:r>
+              <a:rPr sz="1500" b="0">
+                <a:solidFill>
+                  <a:srgbClr val="333333"/>
+                </a:solidFill>
+                <a:latin typeface="Calibri"/>
+              </a:rPr>
+              <a:t>Рассмотрены три архитектурных варианта с разной глубиной интеграции ЦМ ИМА.</a:t>
+            </a:r>
+          </a:p>
+          <a:p>
+            <a:pPr>
+              <a:spcAft>
+                <a:spcPts val="800"/>
+              </a:spcAft>
+            </a:pPr>
+            <a:r>
+              <a:rPr sz="1500" b="0">
+                <a:solidFill>
+                  <a:srgbClr val="333333"/>
+                </a:solidFill>
+                <a:latin typeface="Calibri"/>
+              </a:rPr>
+              <a:t>ТРЗ вариантов 2 и 3 — из бэклогов Excel (листы ЕАРМ-1 и ЕАРМ-2).</a:t>
+            </a:r>
+          </a:p>
+          <a:p>
+            <a:pPr>
+              <a:spcAft>
+                <a:spcPts val="800"/>
+              </a:spcAft>
+            </a:pPr>
+            <a:r>
+              <a:rPr sz="1500" b="0">
+                <a:solidFill>
+                  <a:srgbClr val="333333"/>
+                </a:solidFill>
+                <a:latin typeface="Calibri"/>
+              </a:rPr>
+              <a:t>Вариант 1 — целевая концепция без количественной оценки ТРЗ.</a:t>
+            </a:r>
+          </a:p>
+        </p:txBody>
+      </p:sp>
+    </p:spTree>
+  </p:cSld>
+  <p:clrMapOvr>
+    <a:masterClrMapping/>
+  </p:clrMapOvr>
+</p:sld>
+</file>
+
+<file path=ppt/slides/slide20.xml><?xml version="1.0" encoding="utf-8"?>
+<p:sld xmlns:a="http://schemas.openxmlformats.org/drawingml/2006/main" xmlns:p="http://schemas.openxmlformats.org/presentationml/2006/main" xmlns:r="http://schemas.openxmlformats.org/officeDocument/2006/relationships">
+  <p:cSld>
+    <p:spTree>
+      <p:nvGrpSpPr>
+        <p:cNvPr id="1" name=""/>
+        <p:cNvGrpSpPr/>
+        <p:nvPr/>
+      </p:nvGrpSpPr>
+      <p:grpSpPr/>
+      <p:sp>
+        <p:nvSpPr>
+          <p:cNvPr id="2" name="Rectangle 1"/>
+          <p:cNvSpPr/>
+          <p:nvPr/>
+        </p:nvSpPr>
+        <p:spPr>
+          <a:xfrm>
+            <a:off x="0" y="0"/>
+            <a:ext cx="12191695" cy="6858000"/>
+          </a:xfrm>
+          <a:prstGeom prst="rect">
+            <a:avLst/>
+          </a:prstGeom>
+          <a:solidFill>
+            <a:srgbClr val="F4F6F8"/>
+          </a:solidFill>
+          <a:ln>
+            <a:noFill/>
+          </a:ln>
+        </p:spPr>
+        <p:style>
+          <a:lnRef idx="1">
+            <a:schemeClr val="accent1"/>
+          </a:lnRef>
+          <a:fillRef idx="3">
+            <a:schemeClr val="accent1"/>
+          </a:fillRef>
+          <a:effectRef idx="2">
+            <a:schemeClr val="accent1"/>
+          </a:effectRef>
+          <a:fontRef idx="minor">
+            <a:schemeClr val="lt1"/>
+          </a:fontRef>
+        </p:style>
+        <p:txBody>
+          <a:bodyPr rtlCol="0" anchor="ctr"/>
+          <a:lstStyle/>
+          <a:p>
+            <a:pPr algn="ctr"/>
+          </a:p>
+        </p:txBody>
+      </p:sp>
+      <p:sp>
+        <p:nvSpPr>
+          <p:cNvPr id="3" name="Rectangle 2"/>
+          <p:cNvSpPr/>
+          <p:nvPr/>
+        </p:nvSpPr>
+        <p:spPr>
+          <a:xfrm>
+            <a:off x="0" y="0"/>
+            <a:ext cx="12191695" cy="658368"/>
+          </a:xfrm>
+          <a:prstGeom prst="rect">
+            <a:avLst/>
+          </a:prstGeom>
+          <a:solidFill>
+            <a:srgbClr val="003366"/>
+          </a:solidFill>
+          <a:ln>
+            <a:noFill/>
+          </a:ln>
+        </p:spPr>
+        <p:style>
+          <a:lnRef idx="1">
+            <a:schemeClr val="accent1"/>
+          </a:lnRef>
+          <a:fillRef idx="3">
+            <a:schemeClr val="accent1"/>
+          </a:fillRef>
+          <a:effectRef idx="2">
+            <a:schemeClr val="accent1"/>
+          </a:effectRef>
+          <a:fontRef idx="minor">
+            <a:schemeClr val="lt1"/>
+          </a:fontRef>
+        </p:style>
+        <p:txBody>
+          <a:bodyPr rtlCol="0" anchor="ctr"/>
+          <a:lstStyle/>
+          <a:p>
+            <a:pPr algn="ctr"/>
+          </a:p>
+        </p:txBody>
+      </p:sp>
+      <p:sp>
+        <p:nvSpPr>
+          <p:cNvPr id="4" name="TextBox 3"/>
+          <p:cNvSpPr txBox="1"/>
+          <p:nvPr/>
+        </p:nvSpPr>
+        <p:spPr>
+          <a:xfrm>
+            <a:off x="502920" y="128016"/>
+            <a:ext cx="10515600" cy="457200"/>
+          </a:xfrm>
+          <a:prstGeom prst="rect">
+            <a:avLst/>
+          </a:prstGeom>
+          <a:noFill/>
+        </p:spPr>
+        <p:txBody>
+          <a:bodyPr wrap="none">
+            <a:spAutoFit/>
+          </a:bodyPr>
+          <a:lstStyle/>
+          <a:p>
+            <a:r>
+              <a:rPr sz="2200" b="1">
+                <a:solidFill>
+                  <a:srgbClr val="FFFFFF"/>
+                </a:solidFill>
+                <a:latin typeface="Calibri"/>
+              </a:rPr>
+              <a:t>Сводная аналитика: рейтинг вариантов</a:t>
+            </a:r>
+          </a:p>
+        </p:txBody>
+      </p:sp>
+      <p:sp>
+        <p:nvSpPr>
+          <p:cNvPr id="5" name="Rectangle 4"/>
+          <p:cNvSpPr/>
+          <p:nvPr/>
+        </p:nvSpPr>
+        <p:spPr>
+          <a:xfrm>
+            <a:off x="0" y="658368"/>
+            <a:ext cx="12191695" cy="36576"/>
+          </a:xfrm>
+          <a:prstGeom prst="rect">
+            <a:avLst/>
+          </a:prstGeom>
+          <a:solidFill>
+            <a:srgbClr val="0070C0"/>
+          </a:solidFill>
+          <a:ln>
+            <a:noFill/>
+          </a:ln>
+        </p:spPr>
+        <p:style>
+          <a:lnRef idx="1">
+            <a:schemeClr val="accent1"/>
+          </a:lnRef>
+          <a:fillRef idx="3">
+            <a:schemeClr val="accent1"/>
+          </a:fillRef>
+          <a:effectRef idx="2">
+            <a:schemeClr val="accent1"/>
+          </a:effectRef>
+          <a:fontRef idx="minor">
+            <a:schemeClr val="lt1"/>
+          </a:fontRef>
+        </p:style>
+        <p:txBody>
+          <a:bodyPr rtlCol="0" anchor="ctr"/>
+          <a:lstStyle/>
+          <a:p>
+            <a:pPr algn="ctr"/>
+          </a:p>
+        </p:txBody>
+      </p:sp>
+      <p:sp>
+        <p:nvSpPr>
+          <p:cNvPr id="6" name="Rectangle 5"/>
+          <p:cNvSpPr/>
+          <p:nvPr/>
+        </p:nvSpPr>
+        <p:spPr>
+          <a:xfrm>
+            <a:off x="457200" y="6446520"/>
+            <a:ext cx="11274552" cy="9144"/>
+          </a:xfrm>
+          <a:prstGeom prst="rect">
+            <a:avLst/>
+          </a:prstGeom>
+          <a:solidFill>
+            <a:srgbClr val="CCCCCC"/>
+          </a:solidFill>
+          <a:ln>
+            <a:noFill/>
+          </a:ln>
+        </p:spPr>
+        <p:style>
+          <a:lnRef idx="1">
+            <a:schemeClr val="accent1"/>
+          </a:lnRef>
+          <a:fillRef idx="3">
+            <a:schemeClr val="accent1"/>
+          </a:fillRef>
+          <a:effectRef idx="2">
+            <a:schemeClr val="accent1"/>
+          </a:effectRef>
+          <a:fontRef idx="minor">
+            <a:schemeClr val="lt1"/>
+          </a:fontRef>
+        </p:style>
+        <p:txBody>
+          <a:bodyPr rtlCol="0" anchor="ctr"/>
+          <a:lstStyle/>
+          <a:p>
+            <a:pPr algn="ctr"/>
+          </a:p>
+        </p:txBody>
+      </p:sp>
+      <p:sp>
+        <p:nvSpPr>
+          <p:cNvPr id="7" name="TextBox 6"/>
+          <p:cNvSpPr txBox="1"/>
+          <p:nvPr/>
+        </p:nvSpPr>
+        <p:spPr>
+          <a:xfrm>
+            <a:off x="502920" y="6510528"/>
+            <a:ext cx="7315200" cy="256032"/>
+          </a:xfrm>
+          <a:prstGeom prst="rect">
+            <a:avLst/>
+          </a:prstGeom>
+          <a:noFill/>
+        </p:spPr>
+        <p:txBody>
+          <a:bodyPr wrap="none">
+            <a:spAutoFit/>
+          </a:bodyPr>
+          <a:lstStyle/>
+          <a:p>
+            <a:r>
+              <a:rPr sz="800" b="0">
+                <a:solidFill>
+                  <a:srgbClr val="666666"/>
+                </a:solidFill>
+                <a:latin typeface="Calibri"/>
+              </a:rPr>
+              <a:t>ЦМ ИМА × ЕАРМ  |  Сравнительный анализ вариантов интеграции</a:t>
+            </a:r>
+          </a:p>
+        </p:txBody>
+      </p:sp>
+      <p:sp>
+        <p:nvSpPr>
+          <p:cNvPr id="8" name="TextBox 7"/>
+          <p:cNvSpPr txBox="1"/>
+          <p:nvPr/>
+        </p:nvSpPr>
+        <p:spPr>
+          <a:xfrm>
+            <a:off x="11155680" y="6492240"/>
+            <a:ext cx="731520" cy="274320"/>
+          </a:xfrm>
+          <a:prstGeom prst="rect">
+            <a:avLst/>
+          </a:prstGeom>
+          <a:noFill/>
+        </p:spPr>
+        <p:txBody>
+          <a:bodyPr wrap="none">
+            <a:spAutoFit/>
+          </a:bodyPr>
+          <a:lstStyle/>
+          <a:p>
+            <a:pPr algn="r"/>
+            <a:r>
+              <a:rPr sz="900" b="0">
+                <a:solidFill>
+                  <a:srgbClr val="666666"/>
+                </a:solidFill>
+                <a:latin typeface="Calibri"/>
+              </a:rPr>
+              <a:t>16</a:t>
             </a:r>
           </a:p>
         </p:txBody>
@@ -12545,7 +14449,7 @@
 </p:sld>
 </file>
 
-<file path=ppt/slides/slide2.xml><?xml version="1.0" encoding="utf-8"?>
+<file path=ppt/slides/slide21.xml><?xml version="1.0" encoding="utf-8"?>
 <p:sld xmlns:a="http://schemas.openxmlformats.org/drawingml/2006/main" xmlns:p="http://schemas.openxmlformats.org/presentationml/2006/main" xmlns:r="http://schemas.openxmlformats.org/officeDocument/2006/relationships">
   <p:cSld>
     <p:spTree>
@@ -12670,7 +14574,7 @@
                 </a:solidFill>
                 <a:latin typeface="Calibri"/>
               </a:rPr>
-              <a:t>Цель и контекст</a:t>
+              <a:t>Выводы и рекомендации</a:t>
             </a:r>
           </a:p>
         </p:txBody>
@@ -12825,7 +14729,7 @@
                 </a:solidFill>
                 <a:latin typeface="Calibri"/>
               </a:rPr>
-              <a:t>1</a:t>
+              <a:t>17</a:t>
             </a:r>
           </a:p>
         </p:txBody>
@@ -12864,7 +14768,7 @@
                 </a:solidFill>
                 <a:latin typeface="Calibri"/>
               </a:rPr>
-              <a:t>Обеспечить расчёты моделей ИМА в целевом ландшафте ЕАРМ.</a:t>
+              <a:t>Вариант 1 — стратегическое направление; требуется оценка ТРЗ.</a:t>
             </a:r>
           </a:p>
           <a:p>
@@ -12880,7 +14784,7 @@
                 </a:solidFill>
                 <a:latin typeface="Calibri"/>
               </a:rPr>
-              <a:t>Рассмотрены три архитектурных варианта с разной глубиной интеграции ЦМ ИМА.</a:t>
+              <a:t>Вариант 2 — полная консолидация с максимальными трудозатратами.</a:t>
             </a:r>
           </a:p>
           <a:p>
@@ -12896,7 +14800,7 @@
                 </a:solidFill>
                 <a:latin typeface="Calibri"/>
               </a:rPr>
-              <a:t>ТРЗ вариантов 2 и 3 — из бэклогов Excel (листы ЕАРМ-1 и ЕАРМ-2).</a:t>
+              <a:t>Вариант 3 — оптимален как поэтапный шаг: быстрее и дешевле.</a:t>
             </a:r>
           </a:p>
           <a:p>
@@ -12912,7 +14816,23 @@
                 </a:solidFill>
                 <a:latin typeface="Calibri"/>
               </a:rPr>
-              <a:t>Вариант 1 — целевая концепция без количественной оценки ТРЗ.</a:t>
+              <a:t>Рекомендуемая траектория: В3 → накопление опыта → В1/В2.</a:t>
+            </a:r>
+          </a:p>
+          <a:p>
+            <a:pPr>
+              <a:spcAft>
+                <a:spcPts val="800"/>
+              </a:spcAft>
+            </a:pPr>
+            <a:r>
+              <a:rPr sz="1500" b="0">
+                <a:solidFill>
+                  <a:srgbClr val="333333"/>
+                </a:solidFill>
+                <a:latin typeface="Calibri"/>
+              </a:rPr>
+              <a:t>Критично согласовать API AirFlow и источник валидированной ТМ до старта.</a:t>
             </a:r>
           </a:p>
         </p:txBody>
@@ -12925,403 +14845,7 @@
 </p:sld>
 </file>
 
-<file path=ppt/slides/slide20.xml><?xml version="1.0" encoding="utf-8"?>
-<p:sld xmlns:a="http://schemas.openxmlformats.org/drawingml/2006/main" xmlns:p="http://schemas.openxmlformats.org/presentationml/2006/main" xmlns:r="http://schemas.openxmlformats.org/officeDocument/2006/relationships">
-  <p:cSld>
-    <p:spTree>
-      <p:nvGrpSpPr>
-        <p:cNvPr id="1" name=""/>
-        <p:cNvGrpSpPr/>
-        <p:nvPr/>
-      </p:nvGrpSpPr>
-      <p:grpSpPr/>
-      <p:sp>
-        <p:nvSpPr>
-          <p:cNvPr id="2" name="Rectangle 1"/>
-          <p:cNvSpPr/>
-          <p:nvPr/>
-        </p:nvSpPr>
-        <p:spPr>
-          <a:xfrm>
-            <a:off x="0" y="0"/>
-            <a:ext cx="12191695" cy="6858000"/>
-          </a:xfrm>
-          <a:prstGeom prst="rect">
-            <a:avLst/>
-          </a:prstGeom>
-          <a:solidFill>
-            <a:srgbClr val="F4F6F8"/>
-          </a:solidFill>
-          <a:ln>
-            <a:noFill/>
-          </a:ln>
-        </p:spPr>
-        <p:style>
-          <a:lnRef idx="1">
-            <a:schemeClr val="accent1"/>
-          </a:lnRef>
-          <a:fillRef idx="3">
-            <a:schemeClr val="accent1"/>
-          </a:fillRef>
-          <a:effectRef idx="2">
-            <a:schemeClr val="accent1"/>
-          </a:effectRef>
-          <a:fontRef idx="minor">
-            <a:schemeClr val="lt1"/>
-          </a:fontRef>
-        </p:style>
-        <p:txBody>
-          <a:bodyPr rtlCol="0" anchor="ctr"/>
-          <a:lstStyle/>
-          <a:p>
-            <a:pPr algn="ctr"/>
-          </a:p>
-        </p:txBody>
-      </p:sp>
-      <p:sp>
-        <p:nvSpPr>
-          <p:cNvPr id="3" name="Rectangle 2"/>
-          <p:cNvSpPr/>
-          <p:nvPr/>
-        </p:nvSpPr>
-        <p:spPr>
-          <a:xfrm>
-            <a:off x="0" y="0"/>
-            <a:ext cx="12191695" cy="658368"/>
-          </a:xfrm>
-          <a:prstGeom prst="rect">
-            <a:avLst/>
-          </a:prstGeom>
-          <a:solidFill>
-            <a:srgbClr val="003366"/>
-          </a:solidFill>
-          <a:ln>
-            <a:noFill/>
-          </a:ln>
-        </p:spPr>
-        <p:style>
-          <a:lnRef idx="1">
-            <a:schemeClr val="accent1"/>
-          </a:lnRef>
-          <a:fillRef idx="3">
-            <a:schemeClr val="accent1"/>
-          </a:fillRef>
-          <a:effectRef idx="2">
-            <a:schemeClr val="accent1"/>
-          </a:effectRef>
-          <a:fontRef idx="minor">
-            <a:schemeClr val="lt1"/>
-          </a:fontRef>
-        </p:style>
-        <p:txBody>
-          <a:bodyPr rtlCol="0" anchor="ctr"/>
-          <a:lstStyle/>
-          <a:p>
-            <a:pPr algn="ctr"/>
-          </a:p>
-        </p:txBody>
-      </p:sp>
-      <p:sp>
-        <p:nvSpPr>
-          <p:cNvPr id="4" name="TextBox 3"/>
-          <p:cNvSpPr txBox="1"/>
-          <p:nvPr/>
-        </p:nvSpPr>
-        <p:spPr>
-          <a:xfrm>
-            <a:off x="502920" y="128016"/>
-            <a:ext cx="10515600" cy="457200"/>
-          </a:xfrm>
-          <a:prstGeom prst="rect">
-            <a:avLst/>
-          </a:prstGeom>
-          <a:noFill/>
-        </p:spPr>
-        <p:txBody>
-          <a:bodyPr wrap="none">
-            <a:spAutoFit/>
-          </a:bodyPr>
-          <a:lstStyle/>
-          <a:p>
-            <a:r>
-              <a:rPr sz="2200" b="1">
-                <a:solidFill>
-                  <a:srgbClr val="FFFFFF"/>
-                </a:solidFill>
-                <a:latin typeface="Calibri"/>
-              </a:rPr>
-              <a:t>Выводы и рекомендации</a:t>
-            </a:r>
-          </a:p>
-        </p:txBody>
-      </p:sp>
-      <p:sp>
-        <p:nvSpPr>
-          <p:cNvPr id="5" name="Rectangle 4"/>
-          <p:cNvSpPr/>
-          <p:nvPr/>
-        </p:nvSpPr>
-        <p:spPr>
-          <a:xfrm>
-            <a:off x="0" y="658368"/>
-            <a:ext cx="12191695" cy="36576"/>
-          </a:xfrm>
-          <a:prstGeom prst="rect">
-            <a:avLst/>
-          </a:prstGeom>
-          <a:solidFill>
-            <a:srgbClr val="0070C0"/>
-          </a:solidFill>
-          <a:ln>
-            <a:noFill/>
-          </a:ln>
-        </p:spPr>
-        <p:style>
-          <a:lnRef idx="1">
-            <a:schemeClr val="accent1"/>
-          </a:lnRef>
-          <a:fillRef idx="3">
-            <a:schemeClr val="accent1"/>
-          </a:fillRef>
-          <a:effectRef idx="2">
-            <a:schemeClr val="accent1"/>
-          </a:effectRef>
-          <a:fontRef idx="minor">
-            <a:schemeClr val="lt1"/>
-          </a:fontRef>
-        </p:style>
-        <p:txBody>
-          <a:bodyPr rtlCol="0" anchor="ctr"/>
-          <a:lstStyle/>
-          <a:p>
-            <a:pPr algn="ctr"/>
-          </a:p>
-        </p:txBody>
-      </p:sp>
-      <p:sp>
-        <p:nvSpPr>
-          <p:cNvPr id="6" name="Rectangle 5"/>
-          <p:cNvSpPr/>
-          <p:nvPr/>
-        </p:nvSpPr>
-        <p:spPr>
-          <a:xfrm>
-            <a:off x="457200" y="6446520"/>
-            <a:ext cx="11274552" cy="9144"/>
-          </a:xfrm>
-          <a:prstGeom prst="rect">
-            <a:avLst/>
-          </a:prstGeom>
-          <a:solidFill>
-            <a:srgbClr val="CCCCCC"/>
-          </a:solidFill>
-          <a:ln>
-            <a:noFill/>
-          </a:ln>
-        </p:spPr>
-        <p:style>
-          <a:lnRef idx="1">
-            <a:schemeClr val="accent1"/>
-          </a:lnRef>
-          <a:fillRef idx="3">
-            <a:schemeClr val="accent1"/>
-          </a:fillRef>
-          <a:effectRef idx="2">
-            <a:schemeClr val="accent1"/>
-          </a:effectRef>
-          <a:fontRef idx="minor">
-            <a:schemeClr val="lt1"/>
-          </a:fontRef>
-        </p:style>
-        <p:txBody>
-          <a:bodyPr rtlCol="0" anchor="ctr"/>
-          <a:lstStyle/>
-          <a:p>
-            <a:pPr algn="ctr"/>
-          </a:p>
-        </p:txBody>
-      </p:sp>
-      <p:sp>
-        <p:nvSpPr>
-          <p:cNvPr id="7" name="TextBox 6"/>
-          <p:cNvSpPr txBox="1"/>
-          <p:nvPr/>
-        </p:nvSpPr>
-        <p:spPr>
-          <a:xfrm>
-            <a:off x="502920" y="6510528"/>
-            <a:ext cx="7315200" cy="256032"/>
-          </a:xfrm>
-          <a:prstGeom prst="rect">
-            <a:avLst/>
-          </a:prstGeom>
-          <a:noFill/>
-        </p:spPr>
-        <p:txBody>
-          <a:bodyPr wrap="none">
-            <a:spAutoFit/>
-          </a:bodyPr>
-          <a:lstStyle/>
-          <a:p>
-            <a:r>
-              <a:rPr sz="800" b="0">
-                <a:solidFill>
-                  <a:srgbClr val="666666"/>
-                </a:solidFill>
-                <a:latin typeface="Calibri"/>
-              </a:rPr>
-              <a:t>ЦМ ИМА × ЕАРМ  |  Сравнительный анализ вариантов интеграции</a:t>
-            </a:r>
-          </a:p>
-        </p:txBody>
-      </p:sp>
-      <p:sp>
-        <p:nvSpPr>
-          <p:cNvPr id="8" name="TextBox 7"/>
-          <p:cNvSpPr txBox="1"/>
-          <p:nvPr/>
-        </p:nvSpPr>
-        <p:spPr>
-          <a:xfrm>
-            <a:off x="11155680" y="6492240"/>
-            <a:ext cx="731520" cy="274320"/>
-          </a:xfrm>
-          <a:prstGeom prst="rect">
-            <a:avLst/>
-          </a:prstGeom>
-          <a:noFill/>
-        </p:spPr>
-        <p:txBody>
-          <a:bodyPr wrap="none">
-            <a:spAutoFit/>
-          </a:bodyPr>
-          <a:lstStyle/>
-          <a:p>
-            <a:pPr algn="r"/>
-            <a:r>
-              <a:rPr sz="900" b="0">
-                <a:solidFill>
-                  <a:srgbClr val="666666"/>
-                </a:solidFill>
-                <a:latin typeface="Calibri"/>
-              </a:rPr>
-              <a:t>16</a:t>
-            </a:r>
-          </a:p>
-        </p:txBody>
-      </p:sp>
-      <p:sp>
-        <p:nvSpPr>
-          <p:cNvPr id="9" name="TextBox 8"/>
-          <p:cNvSpPr txBox="1"/>
-          <p:nvPr/>
-        </p:nvSpPr>
-        <p:spPr>
-          <a:xfrm>
-            <a:off x="640080" y="868680"/>
-            <a:ext cx="10972800" cy="5349240"/>
-          </a:xfrm>
-          <a:prstGeom prst="rect">
-            <a:avLst/>
-          </a:prstGeom>
-          <a:noFill/>
-        </p:spPr>
-        <p:txBody>
-          <a:bodyPr wrap="square">
-            <a:spAutoFit/>
-          </a:bodyPr>
-          <a:lstStyle/>
-          <a:p>
-            <a:pPr>
-              <a:spcAft>
-                <a:spcPts val="800"/>
-              </a:spcAft>
-            </a:pPr>
-            <a:r>
-              <a:rPr sz="1500" b="0">
-                <a:solidFill>
-                  <a:srgbClr val="333333"/>
-                </a:solidFill>
-                <a:latin typeface="Calibri"/>
-              </a:rPr>
-              <a:t>Вариант 1 — стратегическое направление; требуется оценка ТРЗ.</a:t>
-            </a:r>
-          </a:p>
-          <a:p>
-            <a:pPr>
-              <a:spcAft>
-                <a:spcPts val="800"/>
-              </a:spcAft>
-            </a:pPr>
-            <a:r>
-              <a:rPr sz="1500" b="0">
-                <a:solidFill>
-                  <a:srgbClr val="333333"/>
-                </a:solidFill>
-                <a:latin typeface="Calibri"/>
-              </a:rPr>
-              <a:t>Вариант 2 — полная консолидация с максимальными трудозатратами.</a:t>
-            </a:r>
-          </a:p>
-          <a:p>
-            <a:pPr>
-              <a:spcAft>
-                <a:spcPts val="800"/>
-              </a:spcAft>
-            </a:pPr>
-            <a:r>
-              <a:rPr sz="1500" b="0">
-                <a:solidFill>
-                  <a:srgbClr val="333333"/>
-                </a:solidFill>
-                <a:latin typeface="Calibri"/>
-              </a:rPr>
-              <a:t>Вариант 3 — оптимален как поэтапный шаг: быстрее и дешевле.</a:t>
-            </a:r>
-          </a:p>
-          <a:p>
-            <a:pPr>
-              <a:spcAft>
-                <a:spcPts val="800"/>
-              </a:spcAft>
-            </a:pPr>
-            <a:r>
-              <a:rPr sz="1500" b="0">
-                <a:solidFill>
-                  <a:srgbClr val="333333"/>
-                </a:solidFill>
-                <a:latin typeface="Calibri"/>
-              </a:rPr>
-              <a:t>Рекомендуемая траектория: В3 → накопление опыта → В1/В2.</a:t>
-            </a:r>
-          </a:p>
-          <a:p>
-            <a:pPr>
-              <a:spcAft>
-                <a:spcPts val="800"/>
-              </a:spcAft>
-            </a:pPr>
-            <a:r>
-              <a:rPr sz="1500" b="0">
-                <a:solidFill>
-                  <a:srgbClr val="333333"/>
-                </a:solidFill>
-                <a:latin typeface="Calibri"/>
-              </a:rPr>
-              <a:t>Критично согласовать API AirFlow и источник валидированной ТМ до старта.</a:t>
-            </a:r>
-          </a:p>
-        </p:txBody>
-      </p:sp>
-    </p:spTree>
-  </p:cSld>
-  <p:clrMapOvr>
-    <a:masterClrMapping/>
-  </p:clrMapOvr>
-</p:sld>
-</file>
-
-<file path=ppt/slides/slide21.xml><?xml version="1.0" encoding="utf-8"?>
+<file path=ppt/slides/slide22.xml><?xml version="1.0" encoding="utf-8"?>
 <p:sld xmlns:a="http://schemas.openxmlformats.org/drawingml/2006/main" xmlns:p="http://schemas.openxmlformats.org/presentationml/2006/main" xmlns:r="http://schemas.openxmlformats.org/officeDocument/2006/relationships">
   <p:cSld>
     <p:spTree>

--- a/docs/presentations/CM_IMA_EAPM_variants_comparison.pptx
+++ b/docs/presentations/CM_IMA_EAPM_variants_comparison.pptx
@@ -27,6 +27,7 @@
     <p:sldId id="275" r:id="rId26"/>
     <p:sldId id="276" r:id="rId27"/>
     <p:sldId id="277" r:id="rId28"/>
+    <p:sldId id="278" r:id="rId29"/>
   </p:sldIdLst>
   <p:sldSz cx="12191695" cy="6858000" type="screen4x3"/>
   <p:notesSz cx="6858000" cy="9144000"/>
@@ -6900,8 +6901,8 @@
         </p:blipFill>
         <p:spPr>
           <a:xfrm>
-            <a:off x="411480" y="914400"/>
-            <a:ext cx="11338560" cy="6161625"/>
+            <a:off x="1342306" y="914400"/>
+            <a:ext cx="9507083" cy="5166360"/>
           </a:xfrm>
           <a:prstGeom prst="rect">
             <a:avLst/>
@@ -11216,7 +11217,7 @@
                 </a:solidFill>
                 <a:latin typeface="Calibri"/>
               </a:rPr>
-              <a:t>Сводное сравнение вариантов</a:t>
+              <a:t>Сравнение вариантов: диаграммы</a:t>
             </a:r>
           </a:p>
         </p:txBody>
@@ -11372,6 +11373,737 @@
                 <a:latin typeface="Calibri"/>
               </a:rPr>
               <a:t>15</a:t>
+            </a:r>
+          </a:p>
+        </p:txBody>
+      </p:sp>
+      <p:pic>
+        <p:nvPicPr>
+          <p:cNvPr id="9" name="Picture 8" descr="variants_comparison_charts.png"/>
+          <p:cNvPicPr>
+            <a:picLocks noChangeAspect="1"/>
+          </p:cNvPicPr>
+          <p:nvPr/>
+        </p:nvPicPr>
+        <p:blipFill>
+          <a:blip r:embed="rId2"/>
+          <a:stretch>
+            <a:fillRect/>
+          </a:stretch>
+        </p:blipFill>
+        <p:spPr>
+          <a:xfrm>
+            <a:off x="671169" y="914400"/>
+            <a:ext cx="10849356" cy="5166360"/>
+          </a:xfrm>
+          <a:prstGeom prst="rect">
+            <a:avLst/>
+          </a:prstGeom>
+        </p:spPr>
+      </p:pic>
+      <p:sp>
+        <p:nvSpPr>
+          <p:cNvPr id="10" name="TextBox 9"/>
+          <p:cNvSpPr txBox="1"/>
+          <p:nvPr/>
+        </p:nvSpPr>
+        <p:spPr>
+          <a:xfrm>
+            <a:off x="502920" y="6199632"/>
+            <a:ext cx="11155680" cy="320040"/>
+          </a:xfrm>
+          <a:prstGeom prst="rect">
+            <a:avLst/>
+          </a:prstGeom>
+          <a:noFill/>
+        </p:spPr>
+        <p:txBody>
+          <a:bodyPr wrap="none">
+            <a:spAutoFit/>
+          </a:bodyPr>
+          <a:lstStyle/>
+          <a:p>
+            <a:r>
+              <a:rPr sz="900" b="0">
+                <a:solidFill>
+                  <a:srgbClr val="666666"/>
+                </a:solidFill>
+                <a:latin typeface="Calibri"/>
+              </a:rPr>
+              <a:t>Столбцы — ТРЗ (ч/д) | Кольцевая — итоговый рейтинг | Гистограмма — критерии | Врезка — индексы плюсов/минусов</a:t>
+            </a:r>
+          </a:p>
+        </p:txBody>
+      </p:sp>
+    </p:spTree>
+  </p:cSld>
+  <p:clrMapOvr>
+    <a:masterClrMapping/>
+  </p:clrMapOvr>
+</p:sld>
+</file>
+
+<file path=ppt/slides/slide2.xml><?xml version="1.0" encoding="utf-8"?>
+<p:sld xmlns:a="http://schemas.openxmlformats.org/drawingml/2006/main" xmlns:p="http://schemas.openxmlformats.org/presentationml/2006/main" xmlns:r="http://schemas.openxmlformats.org/officeDocument/2006/relationships">
+  <p:cSld>
+    <p:spTree>
+      <p:nvGrpSpPr>
+        <p:cNvPr id="1" name=""/>
+        <p:cNvGrpSpPr/>
+        <p:nvPr/>
+      </p:nvGrpSpPr>
+      <p:grpSpPr/>
+      <p:sp>
+        <p:nvSpPr>
+          <p:cNvPr id="2" name="Rectangle 1"/>
+          <p:cNvSpPr/>
+          <p:nvPr/>
+        </p:nvSpPr>
+        <p:spPr>
+          <a:xfrm>
+            <a:off x="0" y="0"/>
+            <a:ext cx="12191695" cy="6858000"/>
+          </a:xfrm>
+          <a:prstGeom prst="rect">
+            <a:avLst/>
+          </a:prstGeom>
+          <a:solidFill>
+            <a:srgbClr val="F4F6F8"/>
+          </a:solidFill>
+          <a:ln>
+            <a:noFill/>
+          </a:ln>
+        </p:spPr>
+        <p:style>
+          <a:lnRef idx="1">
+            <a:schemeClr val="accent1"/>
+          </a:lnRef>
+          <a:fillRef idx="3">
+            <a:schemeClr val="accent1"/>
+          </a:fillRef>
+          <a:effectRef idx="2">
+            <a:schemeClr val="accent1"/>
+          </a:effectRef>
+          <a:fontRef idx="minor">
+            <a:schemeClr val="lt1"/>
+          </a:fontRef>
+        </p:style>
+        <p:txBody>
+          <a:bodyPr rtlCol="0" anchor="ctr"/>
+          <a:lstStyle/>
+          <a:p>
+            <a:pPr algn="ctr"/>
+          </a:p>
+        </p:txBody>
+      </p:sp>
+      <p:sp>
+        <p:nvSpPr>
+          <p:cNvPr id="3" name="Rectangle 2"/>
+          <p:cNvSpPr/>
+          <p:nvPr/>
+        </p:nvSpPr>
+        <p:spPr>
+          <a:xfrm>
+            <a:off x="0" y="0"/>
+            <a:ext cx="12191695" cy="658368"/>
+          </a:xfrm>
+          <a:prstGeom prst="rect">
+            <a:avLst/>
+          </a:prstGeom>
+          <a:solidFill>
+            <a:srgbClr val="003366"/>
+          </a:solidFill>
+          <a:ln>
+            <a:noFill/>
+          </a:ln>
+        </p:spPr>
+        <p:style>
+          <a:lnRef idx="1">
+            <a:schemeClr val="accent1"/>
+          </a:lnRef>
+          <a:fillRef idx="3">
+            <a:schemeClr val="accent1"/>
+          </a:fillRef>
+          <a:effectRef idx="2">
+            <a:schemeClr val="accent1"/>
+          </a:effectRef>
+          <a:fontRef idx="minor">
+            <a:schemeClr val="lt1"/>
+          </a:fontRef>
+        </p:style>
+        <p:txBody>
+          <a:bodyPr rtlCol="0" anchor="ctr"/>
+          <a:lstStyle/>
+          <a:p>
+            <a:pPr algn="ctr"/>
+          </a:p>
+        </p:txBody>
+      </p:sp>
+      <p:sp>
+        <p:nvSpPr>
+          <p:cNvPr id="4" name="TextBox 3"/>
+          <p:cNvSpPr txBox="1"/>
+          <p:nvPr/>
+        </p:nvSpPr>
+        <p:spPr>
+          <a:xfrm>
+            <a:off x="502920" y="128016"/>
+            <a:ext cx="10515600" cy="457200"/>
+          </a:xfrm>
+          <a:prstGeom prst="rect">
+            <a:avLst/>
+          </a:prstGeom>
+          <a:noFill/>
+        </p:spPr>
+        <p:txBody>
+          <a:bodyPr wrap="none">
+            <a:spAutoFit/>
+          </a:bodyPr>
+          <a:lstStyle/>
+          <a:p>
+            <a:r>
+              <a:rPr sz="2200" b="1">
+                <a:solidFill>
+                  <a:srgbClr val="FFFFFF"/>
+                </a:solidFill>
+                <a:latin typeface="Calibri"/>
+              </a:rPr>
+              <a:t>Цель и контекст</a:t>
+            </a:r>
+          </a:p>
+        </p:txBody>
+      </p:sp>
+      <p:sp>
+        <p:nvSpPr>
+          <p:cNvPr id="5" name="Rectangle 4"/>
+          <p:cNvSpPr/>
+          <p:nvPr/>
+        </p:nvSpPr>
+        <p:spPr>
+          <a:xfrm>
+            <a:off x="0" y="658368"/>
+            <a:ext cx="12191695" cy="36576"/>
+          </a:xfrm>
+          <a:prstGeom prst="rect">
+            <a:avLst/>
+          </a:prstGeom>
+          <a:solidFill>
+            <a:srgbClr val="0070C0"/>
+          </a:solidFill>
+          <a:ln>
+            <a:noFill/>
+          </a:ln>
+        </p:spPr>
+        <p:style>
+          <a:lnRef idx="1">
+            <a:schemeClr val="accent1"/>
+          </a:lnRef>
+          <a:fillRef idx="3">
+            <a:schemeClr val="accent1"/>
+          </a:fillRef>
+          <a:effectRef idx="2">
+            <a:schemeClr val="accent1"/>
+          </a:effectRef>
+          <a:fontRef idx="minor">
+            <a:schemeClr val="lt1"/>
+          </a:fontRef>
+        </p:style>
+        <p:txBody>
+          <a:bodyPr rtlCol="0" anchor="ctr"/>
+          <a:lstStyle/>
+          <a:p>
+            <a:pPr algn="ctr"/>
+          </a:p>
+        </p:txBody>
+      </p:sp>
+      <p:sp>
+        <p:nvSpPr>
+          <p:cNvPr id="6" name="Rectangle 5"/>
+          <p:cNvSpPr/>
+          <p:nvPr/>
+        </p:nvSpPr>
+        <p:spPr>
+          <a:xfrm>
+            <a:off x="457200" y="6446520"/>
+            <a:ext cx="11274552" cy="9144"/>
+          </a:xfrm>
+          <a:prstGeom prst="rect">
+            <a:avLst/>
+          </a:prstGeom>
+          <a:solidFill>
+            <a:srgbClr val="CCCCCC"/>
+          </a:solidFill>
+          <a:ln>
+            <a:noFill/>
+          </a:ln>
+        </p:spPr>
+        <p:style>
+          <a:lnRef idx="1">
+            <a:schemeClr val="accent1"/>
+          </a:lnRef>
+          <a:fillRef idx="3">
+            <a:schemeClr val="accent1"/>
+          </a:fillRef>
+          <a:effectRef idx="2">
+            <a:schemeClr val="accent1"/>
+          </a:effectRef>
+          <a:fontRef idx="minor">
+            <a:schemeClr val="lt1"/>
+          </a:fontRef>
+        </p:style>
+        <p:txBody>
+          <a:bodyPr rtlCol="0" anchor="ctr"/>
+          <a:lstStyle/>
+          <a:p>
+            <a:pPr algn="ctr"/>
+          </a:p>
+        </p:txBody>
+      </p:sp>
+      <p:sp>
+        <p:nvSpPr>
+          <p:cNvPr id="7" name="TextBox 6"/>
+          <p:cNvSpPr txBox="1"/>
+          <p:nvPr/>
+        </p:nvSpPr>
+        <p:spPr>
+          <a:xfrm>
+            <a:off x="502920" y="6510528"/>
+            <a:ext cx="7315200" cy="256032"/>
+          </a:xfrm>
+          <a:prstGeom prst="rect">
+            <a:avLst/>
+          </a:prstGeom>
+          <a:noFill/>
+        </p:spPr>
+        <p:txBody>
+          <a:bodyPr wrap="none">
+            <a:spAutoFit/>
+          </a:bodyPr>
+          <a:lstStyle/>
+          <a:p>
+            <a:r>
+              <a:rPr sz="800" b="0">
+                <a:solidFill>
+                  <a:srgbClr val="666666"/>
+                </a:solidFill>
+                <a:latin typeface="Calibri"/>
+              </a:rPr>
+              <a:t>ЦМ ИМА × ЕАРМ  |  Сравнительный анализ вариантов интеграции</a:t>
+            </a:r>
+          </a:p>
+        </p:txBody>
+      </p:sp>
+      <p:sp>
+        <p:nvSpPr>
+          <p:cNvPr id="8" name="TextBox 7"/>
+          <p:cNvSpPr txBox="1"/>
+          <p:nvPr/>
+        </p:nvSpPr>
+        <p:spPr>
+          <a:xfrm>
+            <a:off x="11155680" y="6492240"/>
+            <a:ext cx="731520" cy="274320"/>
+          </a:xfrm>
+          <a:prstGeom prst="rect">
+            <a:avLst/>
+          </a:prstGeom>
+          <a:noFill/>
+        </p:spPr>
+        <p:txBody>
+          <a:bodyPr wrap="none">
+            <a:spAutoFit/>
+          </a:bodyPr>
+          <a:lstStyle/>
+          <a:p>
+            <a:pPr algn="r"/>
+            <a:r>
+              <a:rPr sz="900" b="0">
+                <a:solidFill>
+                  <a:srgbClr val="666666"/>
+                </a:solidFill>
+                <a:latin typeface="Calibri"/>
+              </a:rPr>
+              <a:t>1</a:t>
+            </a:r>
+          </a:p>
+        </p:txBody>
+      </p:sp>
+      <p:sp>
+        <p:nvSpPr>
+          <p:cNvPr id="9" name="TextBox 8"/>
+          <p:cNvSpPr txBox="1"/>
+          <p:nvPr/>
+        </p:nvSpPr>
+        <p:spPr>
+          <a:xfrm>
+            <a:off x="640080" y="868680"/>
+            <a:ext cx="10972800" cy="5349240"/>
+          </a:xfrm>
+          <a:prstGeom prst="rect">
+            <a:avLst/>
+          </a:prstGeom>
+          <a:noFill/>
+        </p:spPr>
+        <p:txBody>
+          <a:bodyPr wrap="square">
+            <a:spAutoFit/>
+          </a:bodyPr>
+          <a:lstStyle/>
+          <a:p>
+            <a:pPr>
+              <a:spcAft>
+                <a:spcPts val="800"/>
+              </a:spcAft>
+            </a:pPr>
+            <a:r>
+              <a:rPr sz="1500" b="0">
+                <a:solidFill>
+                  <a:srgbClr val="333333"/>
+                </a:solidFill>
+                <a:latin typeface="Calibri"/>
+              </a:rPr>
+              <a:t>Обеспечить расчёты моделей ИМА в целевом ландшафте ЕАРМ.</a:t>
+            </a:r>
+          </a:p>
+          <a:p>
+            <a:pPr>
+              <a:spcAft>
+                <a:spcPts val="800"/>
+              </a:spcAft>
+            </a:pPr>
+            <a:r>
+              <a:rPr sz="1500" b="0">
+                <a:solidFill>
+                  <a:srgbClr val="333333"/>
+                </a:solidFill>
+                <a:latin typeface="Calibri"/>
+              </a:rPr>
+              <a:t>Рассмотрены три архитектурных варианта с разной глубиной интеграции ЦМ ИМА.</a:t>
+            </a:r>
+          </a:p>
+          <a:p>
+            <a:pPr>
+              <a:spcAft>
+                <a:spcPts val="800"/>
+              </a:spcAft>
+            </a:pPr>
+            <a:r>
+              <a:rPr sz="1500" b="0">
+                <a:solidFill>
+                  <a:srgbClr val="333333"/>
+                </a:solidFill>
+                <a:latin typeface="Calibri"/>
+              </a:rPr>
+              <a:t>ТРЗ вариантов 2 и 3 — из бэклогов Excel (листы ЕАРМ-1 и ЕАРМ-2).</a:t>
+            </a:r>
+          </a:p>
+          <a:p>
+            <a:pPr>
+              <a:spcAft>
+                <a:spcPts val="800"/>
+              </a:spcAft>
+            </a:pPr>
+            <a:r>
+              <a:rPr sz="1500" b="0">
+                <a:solidFill>
+                  <a:srgbClr val="333333"/>
+                </a:solidFill>
+                <a:latin typeface="Calibri"/>
+              </a:rPr>
+              <a:t>Вариант 1 — целевая концепция без количественной оценки ТРЗ.</a:t>
+            </a:r>
+          </a:p>
+        </p:txBody>
+      </p:sp>
+    </p:spTree>
+  </p:cSld>
+  <p:clrMapOvr>
+    <a:masterClrMapping/>
+  </p:clrMapOvr>
+</p:sld>
+</file>
+
+<file path=ppt/slides/slide20.xml><?xml version="1.0" encoding="utf-8"?>
+<p:sld xmlns:a="http://schemas.openxmlformats.org/drawingml/2006/main" xmlns:p="http://schemas.openxmlformats.org/presentationml/2006/main" xmlns:r="http://schemas.openxmlformats.org/officeDocument/2006/relationships">
+  <p:cSld>
+    <p:spTree>
+      <p:nvGrpSpPr>
+        <p:cNvPr id="1" name=""/>
+        <p:cNvGrpSpPr/>
+        <p:nvPr/>
+      </p:nvGrpSpPr>
+      <p:grpSpPr/>
+      <p:sp>
+        <p:nvSpPr>
+          <p:cNvPr id="2" name="Rectangle 1"/>
+          <p:cNvSpPr/>
+          <p:nvPr/>
+        </p:nvSpPr>
+        <p:spPr>
+          <a:xfrm>
+            <a:off x="0" y="0"/>
+            <a:ext cx="12191695" cy="6858000"/>
+          </a:xfrm>
+          <a:prstGeom prst="rect">
+            <a:avLst/>
+          </a:prstGeom>
+          <a:solidFill>
+            <a:srgbClr val="F4F6F8"/>
+          </a:solidFill>
+          <a:ln>
+            <a:noFill/>
+          </a:ln>
+        </p:spPr>
+        <p:style>
+          <a:lnRef idx="1">
+            <a:schemeClr val="accent1"/>
+          </a:lnRef>
+          <a:fillRef idx="3">
+            <a:schemeClr val="accent1"/>
+          </a:fillRef>
+          <a:effectRef idx="2">
+            <a:schemeClr val="accent1"/>
+          </a:effectRef>
+          <a:fontRef idx="minor">
+            <a:schemeClr val="lt1"/>
+          </a:fontRef>
+        </p:style>
+        <p:txBody>
+          <a:bodyPr rtlCol="0" anchor="ctr"/>
+          <a:lstStyle/>
+          <a:p>
+            <a:pPr algn="ctr"/>
+          </a:p>
+        </p:txBody>
+      </p:sp>
+      <p:sp>
+        <p:nvSpPr>
+          <p:cNvPr id="3" name="Rectangle 2"/>
+          <p:cNvSpPr/>
+          <p:nvPr/>
+        </p:nvSpPr>
+        <p:spPr>
+          <a:xfrm>
+            <a:off x="0" y="0"/>
+            <a:ext cx="12191695" cy="658368"/>
+          </a:xfrm>
+          <a:prstGeom prst="rect">
+            <a:avLst/>
+          </a:prstGeom>
+          <a:solidFill>
+            <a:srgbClr val="003366"/>
+          </a:solidFill>
+          <a:ln>
+            <a:noFill/>
+          </a:ln>
+        </p:spPr>
+        <p:style>
+          <a:lnRef idx="1">
+            <a:schemeClr val="accent1"/>
+          </a:lnRef>
+          <a:fillRef idx="3">
+            <a:schemeClr val="accent1"/>
+          </a:fillRef>
+          <a:effectRef idx="2">
+            <a:schemeClr val="accent1"/>
+          </a:effectRef>
+          <a:fontRef idx="minor">
+            <a:schemeClr val="lt1"/>
+          </a:fontRef>
+        </p:style>
+        <p:txBody>
+          <a:bodyPr rtlCol="0" anchor="ctr"/>
+          <a:lstStyle/>
+          <a:p>
+            <a:pPr algn="ctr"/>
+          </a:p>
+        </p:txBody>
+      </p:sp>
+      <p:sp>
+        <p:nvSpPr>
+          <p:cNvPr id="4" name="TextBox 3"/>
+          <p:cNvSpPr txBox="1"/>
+          <p:nvPr/>
+        </p:nvSpPr>
+        <p:spPr>
+          <a:xfrm>
+            <a:off x="502920" y="128016"/>
+            <a:ext cx="10515600" cy="457200"/>
+          </a:xfrm>
+          <a:prstGeom prst="rect">
+            <a:avLst/>
+          </a:prstGeom>
+          <a:noFill/>
+        </p:spPr>
+        <p:txBody>
+          <a:bodyPr wrap="none">
+            <a:spAutoFit/>
+          </a:bodyPr>
+          <a:lstStyle/>
+          <a:p>
+            <a:r>
+              <a:rPr sz="2200" b="1">
+                <a:solidFill>
+                  <a:srgbClr val="FFFFFF"/>
+                </a:solidFill>
+                <a:latin typeface="Calibri"/>
+              </a:rPr>
+              <a:t>Сводное сравнение вариантов</a:t>
+            </a:r>
+          </a:p>
+        </p:txBody>
+      </p:sp>
+      <p:sp>
+        <p:nvSpPr>
+          <p:cNvPr id="5" name="Rectangle 4"/>
+          <p:cNvSpPr/>
+          <p:nvPr/>
+        </p:nvSpPr>
+        <p:spPr>
+          <a:xfrm>
+            <a:off x="0" y="658368"/>
+            <a:ext cx="12191695" cy="36576"/>
+          </a:xfrm>
+          <a:prstGeom prst="rect">
+            <a:avLst/>
+          </a:prstGeom>
+          <a:solidFill>
+            <a:srgbClr val="0070C0"/>
+          </a:solidFill>
+          <a:ln>
+            <a:noFill/>
+          </a:ln>
+        </p:spPr>
+        <p:style>
+          <a:lnRef idx="1">
+            <a:schemeClr val="accent1"/>
+          </a:lnRef>
+          <a:fillRef idx="3">
+            <a:schemeClr val="accent1"/>
+          </a:fillRef>
+          <a:effectRef idx="2">
+            <a:schemeClr val="accent1"/>
+          </a:effectRef>
+          <a:fontRef idx="minor">
+            <a:schemeClr val="lt1"/>
+          </a:fontRef>
+        </p:style>
+        <p:txBody>
+          <a:bodyPr rtlCol="0" anchor="ctr"/>
+          <a:lstStyle/>
+          <a:p>
+            <a:pPr algn="ctr"/>
+          </a:p>
+        </p:txBody>
+      </p:sp>
+      <p:sp>
+        <p:nvSpPr>
+          <p:cNvPr id="6" name="Rectangle 5"/>
+          <p:cNvSpPr/>
+          <p:nvPr/>
+        </p:nvSpPr>
+        <p:spPr>
+          <a:xfrm>
+            <a:off x="457200" y="6446520"/>
+            <a:ext cx="11274552" cy="9144"/>
+          </a:xfrm>
+          <a:prstGeom prst="rect">
+            <a:avLst/>
+          </a:prstGeom>
+          <a:solidFill>
+            <a:srgbClr val="CCCCCC"/>
+          </a:solidFill>
+          <a:ln>
+            <a:noFill/>
+          </a:ln>
+        </p:spPr>
+        <p:style>
+          <a:lnRef idx="1">
+            <a:schemeClr val="accent1"/>
+          </a:lnRef>
+          <a:fillRef idx="3">
+            <a:schemeClr val="accent1"/>
+          </a:fillRef>
+          <a:effectRef idx="2">
+            <a:schemeClr val="accent1"/>
+          </a:effectRef>
+          <a:fontRef idx="minor">
+            <a:schemeClr val="lt1"/>
+          </a:fontRef>
+        </p:style>
+        <p:txBody>
+          <a:bodyPr rtlCol="0" anchor="ctr"/>
+          <a:lstStyle/>
+          <a:p>
+            <a:pPr algn="ctr"/>
+          </a:p>
+        </p:txBody>
+      </p:sp>
+      <p:sp>
+        <p:nvSpPr>
+          <p:cNvPr id="7" name="TextBox 6"/>
+          <p:cNvSpPr txBox="1"/>
+          <p:nvPr/>
+        </p:nvSpPr>
+        <p:spPr>
+          <a:xfrm>
+            <a:off x="502920" y="6510528"/>
+            <a:ext cx="7315200" cy="256032"/>
+          </a:xfrm>
+          <a:prstGeom prst="rect">
+            <a:avLst/>
+          </a:prstGeom>
+          <a:noFill/>
+        </p:spPr>
+        <p:txBody>
+          <a:bodyPr wrap="none">
+            <a:spAutoFit/>
+          </a:bodyPr>
+          <a:lstStyle/>
+          <a:p>
+            <a:r>
+              <a:rPr sz="800" b="0">
+                <a:solidFill>
+                  <a:srgbClr val="666666"/>
+                </a:solidFill>
+                <a:latin typeface="Calibri"/>
+              </a:rPr>
+              <a:t>ЦМ ИМА × ЕАРМ  |  Сравнительный анализ вариантов интеграции</a:t>
+            </a:r>
+          </a:p>
+        </p:txBody>
+      </p:sp>
+      <p:sp>
+        <p:nvSpPr>
+          <p:cNvPr id="8" name="TextBox 7"/>
+          <p:cNvSpPr txBox="1"/>
+          <p:nvPr/>
+        </p:nvSpPr>
+        <p:spPr>
+          <a:xfrm>
+            <a:off x="11155680" y="6492240"/>
+            <a:ext cx="731520" cy="274320"/>
+          </a:xfrm>
+          <a:prstGeom prst="rect">
+            <a:avLst/>
+          </a:prstGeom>
+          <a:noFill/>
+        </p:spPr>
+        <p:txBody>
+          <a:bodyPr wrap="none">
+            <a:spAutoFit/>
+          </a:bodyPr>
+          <a:lstStyle/>
+          <a:p>
+            <a:pPr algn="r"/>
+            <a:r>
+              <a:rPr sz="900" b="0">
+                <a:solidFill>
+                  <a:srgbClr val="666666"/>
+                </a:solidFill>
+                <a:latin typeface="Calibri"/>
+              </a:rPr>
+              <a:t>16</a:t>
             </a:r>
           </a:p>
         </p:txBody>
@@ -12196,7 +12928,7 @@
 </p:sld>
 </file>
 
-<file path=ppt/slides/slide2.xml><?xml version="1.0" encoding="utf-8"?>
+<file path=ppt/slides/slide21.xml><?xml version="1.0" encoding="utf-8"?>
 <p:sld xmlns:a="http://schemas.openxmlformats.org/drawingml/2006/main" xmlns:p="http://schemas.openxmlformats.org/presentationml/2006/main" xmlns:r="http://schemas.openxmlformats.org/officeDocument/2006/relationships">
   <p:cSld>
     <p:spTree>
@@ -12321,7 +13053,7 @@
                 </a:solidFill>
                 <a:latin typeface="Calibri"/>
               </a:rPr>
-              <a:t>Цель и контекст</a:t>
+              <a:t>Сводная аналитика: рейтинг вариантов</a:t>
             </a:r>
           </a:p>
         </p:txBody>
@@ -12476,387 +13208,7 @@
                 </a:solidFill>
                 <a:latin typeface="Calibri"/>
               </a:rPr>
-              <a:t>1</a:t>
-            </a:r>
-          </a:p>
-        </p:txBody>
-      </p:sp>
-      <p:sp>
-        <p:nvSpPr>
-          <p:cNvPr id="9" name="TextBox 8"/>
-          <p:cNvSpPr txBox="1"/>
-          <p:nvPr/>
-        </p:nvSpPr>
-        <p:spPr>
-          <a:xfrm>
-            <a:off x="640080" y="868680"/>
-            <a:ext cx="10972800" cy="5349240"/>
-          </a:xfrm>
-          <a:prstGeom prst="rect">
-            <a:avLst/>
-          </a:prstGeom>
-          <a:noFill/>
-        </p:spPr>
-        <p:txBody>
-          <a:bodyPr wrap="square">
-            <a:spAutoFit/>
-          </a:bodyPr>
-          <a:lstStyle/>
-          <a:p>
-            <a:pPr>
-              <a:spcAft>
-                <a:spcPts val="800"/>
-              </a:spcAft>
-            </a:pPr>
-            <a:r>
-              <a:rPr sz="1500" b="0">
-                <a:solidFill>
-                  <a:srgbClr val="333333"/>
-                </a:solidFill>
-                <a:latin typeface="Calibri"/>
-              </a:rPr>
-              <a:t>Обеспечить расчёты моделей ИМА в целевом ландшафте ЕАРМ.</a:t>
-            </a:r>
-          </a:p>
-          <a:p>
-            <a:pPr>
-              <a:spcAft>
-                <a:spcPts val="800"/>
-              </a:spcAft>
-            </a:pPr>
-            <a:r>
-              <a:rPr sz="1500" b="0">
-                <a:solidFill>
-                  <a:srgbClr val="333333"/>
-                </a:solidFill>
-                <a:latin typeface="Calibri"/>
-              </a:rPr>
-              <a:t>Рассмотрены три архитектурных варианта с разной глубиной интеграции ЦМ ИМА.</a:t>
-            </a:r>
-          </a:p>
-          <a:p>
-            <a:pPr>
-              <a:spcAft>
-                <a:spcPts val="800"/>
-              </a:spcAft>
-            </a:pPr>
-            <a:r>
-              <a:rPr sz="1500" b="0">
-                <a:solidFill>
-                  <a:srgbClr val="333333"/>
-                </a:solidFill>
-                <a:latin typeface="Calibri"/>
-              </a:rPr>
-              <a:t>ТРЗ вариантов 2 и 3 — из бэклогов Excel (листы ЕАРМ-1 и ЕАРМ-2).</a:t>
-            </a:r>
-          </a:p>
-          <a:p>
-            <a:pPr>
-              <a:spcAft>
-                <a:spcPts val="800"/>
-              </a:spcAft>
-            </a:pPr>
-            <a:r>
-              <a:rPr sz="1500" b="0">
-                <a:solidFill>
-                  <a:srgbClr val="333333"/>
-                </a:solidFill>
-                <a:latin typeface="Calibri"/>
-              </a:rPr>
-              <a:t>Вариант 1 — целевая концепция без количественной оценки ТРЗ.</a:t>
-            </a:r>
-          </a:p>
-        </p:txBody>
-      </p:sp>
-    </p:spTree>
-  </p:cSld>
-  <p:clrMapOvr>
-    <a:masterClrMapping/>
-  </p:clrMapOvr>
-</p:sld>
-</file>
-
-<file path=ppt/slides/slide20.xml><?xml version="1.0" encoding="utf-8"?>
-<p:sld xmlns:a="http://schemas.openxmlformats.org/drawingml/2006/main" xmlns:p="http://schemas.openxmlformats.org/presentationml/2006/main" xmlns:r="http://schemas.openxmlformats.org/officeDocument/2006/relationships">
-  <p:cSld>
-    <p:spTree>
-      <p:nvGrpSpPr>
-        <p:cNvPr id="1" name=""/>
-        <p:cNvGrpSpPr/>
-        <p:nvPr/>
-      </p:nvGrpSpPr>
-      <p:grpSpPr/>
-      <p:sp>
-        <p:nvSpPr>
-          <p:cNvPr id="2" name="Rectangle 1"/>
-          <p:cNvSpPr/>
-          <p:nvPr/>
-        </p:nvSpPr>
-        <p:spPr>
-          <a:xfrm>
-            <a:off x="0" y="0"/>
-            <a:ext cx="12191695" cy="6858000"/>
-          </a:xfrm>
-          <a:prstGeom prst="rect">
-            <a:avLst/>
-          </a:prstGeom>
-          <a:solidFill>
-            <a:srgbClr val="F4F6F8"/>
-          </a:solidFill>
-          <a:ln>
-            <a:noFill/>
-          </a:ln>
-        </p:spPr>
-        <p:style>
-          <a:lnRef idx="1">
-            <a:schemeClr val="accent1"/>
-          </a:lnRef>
-          <a:fillRef idx="3">
-            <a:schemeClr val="accent1"/>
-          </a:fillRef>
-          <a:effectRef idx="2">
-            <a:schemeClr val="accent1"/>
-          </a:effectRef>
-          <a:fontRef idx="minor">
-            <a:schemeClr val="lt1"/>
-          </a:fontRef>
-        </p:style>
-        <p:txBody>
-          <a:bodyPr rtlCol="0" anchor="ctr"/>
-          <a:lstStyle/>
-          <a:p>
-            <a:pPr algn="ctr"/>
-          </a:p>
-        </p:txBody>
-      </p:sp>
-      <p:sp>
-        <p:nvSpPr>
-          <p:cNvPr id="3" name="Rectangle 2"/>
-          <p:cNvSpPr/>
-          <p:nvPr/>
-        </p:nvSpPr>
-        <p:spPr>
-          <a:xfrm>
-            <a:off x="0" y="0"/>
-            <a:ext cx="12191695" cy="658368"/>
-          </a:xfrm>
-          <a:prstGeom prst="rect">
-            <a:avLst/>
-          </a:prstGeom>
-          <a:solidFill>
-            <a:srgbClr val="003366"/>
-          </a:solidFill>
-          <a:ln>
-            <a:noFill/>
-          </a:ln>
-        </p:spPr>
-        <p:style>
-          <a:lnRef idx="1">
-            <a:schemeClr val="accent1"/>
-          </a:lnRef>
-          <a:fillRef idx="3">
-            <a:schemeClr val="accent1"/>
-          </a:fillRef>
-          <a:effectRef idx="2">
-            <a:schemeClr val="accent1"/>
-          </a:effectRef>
-          <a:fontRef idx="minor">
-            <a:schemeClr val="lt1"/>
-          </a:fontRef>
-        </p:style>
-        <p:txBody>
-          <a:bodyPr rtlCol="0" anchor="ctr"/>
-          <a:lstStyle/>
-          <a:p>
-            <a:pPr algn="ctr"/>
-          </a:p>
-        </p:txBody>
-      </p:sp>
-      <p:sp>
-        <p:nvSpPr>
-          <p:cNvPr id="4" name="TextBox 3"/>
-          <p:cNvSpPr txBox="1"/>
-          <p:nvPr/>
-        </p:nvSpPr>
-        <p:spPr>
-          <a:xfrm>
-            <a:off x="502920" y="128016"/>
-            <a:ext cx="10515600" cy="457200"/>
-          </a:xfrm>
-          <a:prstGeom prst="rect">
-            <a:avLst/>
-          </a:prstGeom>
-          <a:noFill/>
-        </p:spPr>
-        <p:txBody>
-          <a:bodyPr wrap="none">
-            <a:spAutoFit/>
-          </a:bodyPr>
-          <a:lstStyle/>
-          <a:p>
-            <a:r>
-              <a:rPr sz="2200" b="1">
-                <a:solidFill>
-                  <a:srgbClr val="FFFFFF"/>
-                </a:solidFill>
-                <a:latin typeface="Calibri"/>
-              </a:rPr>
-              <a:t>Сводная аналитика: рейтинг вариантов</a:t>
-            </a:r>
-          </a:p>
-        </p:txBody>
-      </p:sp>
-      <p:sp>
-        <p:nvSpPr>
-          <p:cNvPr id="5" name="Rectangle 4"/>
-          <p:cNvSpPr/>
-          <p:nvPr/>
-        </p:nvSpPr>
-        <p:spPr>
-          <a:xfrm>
-            <a:off x="0" y="658368"/>
-            <a:ext cx="12191695" cy="36576"/>
-          </a:xfrm>
-          <a:prstGeom prst="rect">
-            <a:avLst/>
-          </a:prstGeom>
-          <a:solidFill>
-            <a:srgbClr val="0070C0"/>
-          </a:solidFill>
-          <a:ln>
-            <a:noFill/>
-          </a:ln>
-        </p:spPr>
-        <p:style>
-          <a:lnRef idx="1">
-            <a:schemeClr val="accent1"/>
-          </a:lnRef>
-          <a:fillRef idx="3">
-            <a:schemeClr val="accent1"/>
-          </a:fillRef>
-          <a:effectRef idx="2">
-            <a:schemeClr val="accent1"/>
-          </a:effectRef>
-          <a:fontRef idx="minor">
-            <a:schemeClr val="lt1"/>
-          </a:fontRef>
-        </p:style>
-        <p:txBody>
-          <a:bodyPr rtlCol="0" anchor="ctr"/>
-          <a:lstStyle/>
-          <a:p>
-            <a:pPr algn="ctr"/>
-          </a:p>
-        </p:txBody>
-      </p:sp>
-      <p:sp>
-        <p:nvSpPr>
-          <p:cNvPr id="6" name="Rectangle 5"/>
-          <p:cNvSpPr/>
-          <p:nvPr/>
-        </p:nvSpPr>
-        <p:spPr>
-          <a:xfrm>
-            <a:off x="457200" y="6446520"/>
-            <a:ext cx="11274552" cy="9144"/>
-          </a:xfrm>
-          <a:prstGeom prst="rect">
-            <a:avLst/>
-          </a:prstGeom>
-          <a:solidFill>
-            <a:srgbClr val="CCCCCC"/>
-          </a:solidFill>
-          <a:ln>
-            <a:noFill/>
-          </a:ln>
-        </p:spPr>
-        <p:style>
-          <a:lnRef idx="1">
-            <a:schemeClr val="accent1"/>
-          </a:lnRef>
-          <a:fillRef idx="3">
-            <a:schemeClr val="accent1"/>
-          </a:fillRef>
-          <a:effectRef idx="2">
-            <a:schemeClr val="accent1"/>
-          </a:effectRef>
-          <a:fontRef idx="minor">
-            <a:schemeClr val="lt1"/>
-          </a:fontRef>
-        </p:style>
-        <p:txBody>
-          <a:bodyPr rtlCol="0" anchor="ctr"/>
-          <a:lstStyle/>
-          <a:p>
-            <a:pPr algn="ctr"/>
-          </a:p>
-        </p:txBody>
-      </p:sp>
-      <p:sp>
-        <p:nvSpPr>
-          <p:cNvPr id="7" name="TextBox 6"/>
-          <p:cNvSpPr txBox="1"/>
-          <p:nvPr/>
-        </p:nvSpPr>
-        <p:spPr>
-          <a:xfrm>
-            <a:off x="502920" y="6510528"/>
-            <a:ext cx="7315200" cy="256032"/>
-          </a:xfrm>
-          <a:prstGeom prst="rect">
-            <a:avLst/>
-          </a:prstGeom>
-          <a:noFill/>
-        </p:spPr>
-        <p:txBody>
-          <a:bodyPr wrap="none">
-            <a:spAutoFit/>
-          </a:bodyPr>
-          <a:lstStyle/>
-          <a:p>
-            <a:r>
-              <a:rPr sz="800" b="0">
-                <a:solidFill>
-                  <a:srgbClr val="666666"/>
-                </a:solidFill>
-                <a:latin typeface="Calibri"/>
-              </a:rPr>
-              <a:t>ЦМ ИМА × ЕАРМ  |  Сравнительный анализ вариантов интеграции</a:t>
-            </a:r>
-          </a:p>
-        </p:txBody>
-      </p:sp>
-      <p:sp>
-        <p:nvSpPr>
-          <p:cNvPr id="8" name="TextBox 7"/>
-          <p:cNvSpPr txBox="1"/>
-          <p:nvPr/>
-        </p:nvSpPr>
-        <p:spPr>
-          <a:xfrm>
-            <a:off x="11155680" y="6492240"/>
-            <a:ext cx="731520" cy="274320"/>
-          </a:xfrm>
-          <a:prstGeom prst="rect">
-            <a:avLst/>
-          </a:prstGeom>
-          <a:noFill/>
-        </p:spPr>
-        <p:txBody>
-          <a:bodyPr wrap="none">
-            <a:spAutoFit/>
-          </a:bodyPr>
-          <a:lstStyle/>
-          <a:p>
-            <a:pPr algn="r"/>
-            <a:r>
-              <a:rPr sz="900" b="0">
-                <a:solidFill>
-                  <a:srgbClr val="666666"/>
-                </a:solidFill>
-                <a:latin typeface="Calibri"/>
-              </a:rPr>
-              <a:t>16</a:t>
+              <a:t>17</a:t>
             </a:r>
           </a:p>
         </p:txBody>
@@ -14449,7 +14801,7 @@
 </p:sld>
 </file>
 
-<file path=ppt/slides/slide21.xml><?xml version="1.0" encoding="utf-8"?>
+<file path=ppt/slides/slide22.xml><?xml version="1.0" encoding="utf-8"?>
 <p:sld xmlns:a="http://schemas.openxmlformats.org/drawingml/2006/main" xmlns:p="http://schemas.openxmlformats.org/presentationml/2006/main" xmlns:r="http://schemas.openxmlformats.org/officeDocument/2006/relationships">
   <p:cSld>
     <p:spTree>
@@ -14729,7 +15081,7 @@
                 </a:solidFill>
                 <a:latin typeface="Calibri"/>
               </a:rPr>
-              <a:t>17</a:t>
+              <a:t>18</a:t>
             </a:r>
           </a:p>
         </p:txBody>
@@ -14845,7 +15197,7 @@
 </p:sld>
 </file>
 
-<file path=ppt/slides/slide22.xml><?xml version="1.0" encoding="utf-8"?>
+<file path=ppt/slides/slide23.xml><?xml version="1.0" encoding="utf-8"?>
 <p:sld xmlns:a="http://schemas.openxmlformats.org/drawingml/2006/main" xmlns:p="http://schemas.openxmlformats.org/presentationml/2006/main" xmlns:r="http://schemas.openxmlformats.org/officeDocument/2006/relationships">
   <p:cSld>
     <p:spTree>
@@ -15828,7 +16180,7 @@
         </p:blipFill>
         <p:spPr>
           <a:xfrm>
-            <a:off x="411480" y="914400"/>
+            <a:off x="426567" y="914400"/>
             <a:ext cx="11338560" cy="4843771"/>
           </a:xfrm>
           <a:prstGeom prst="rect">
@@ -17190,7 +17542,7 @@
         </p:blipFill>
         <p:spPr>
           <a:xfrm>
-            <a:off x="411480" y="914400"/>
+            <a:off x="426567" y="914400"/>
             <a:ext cx="11338560" cy="4247931"/>
           </a:xfrm>
           <a:prstGeom prst="rect">
